--- a/outputs/L.B._strategie_innovation.pptx
+++ b/outputs/L.B._strategie_innovation.pptx
@@ -3689,7 +3689,7 @@
                 </a:solidFill>
                 <a:latin typeface="Alegreya Sans"/>
               </a:rPr>
-              <a:t>EXPÉRIENCE PROFESSIONNELLE</a:t>
+              <a:t>PRINCIPALES EXPÉRIENCES PROFESSIONNELLES</a:t>
             </a:r>
           </a:p>
           <a:p>
@@ -4763,7 +4763,7 @@
                 </a:solidFill>
                 <a:latin typeface="Alegreya Sans"/>
               </a:rPr>
-              <a:t>PROFESSIONAL EXPERIENCE</a:t>
+              <a:t>MAIN PROFESSIONAL EXPERIENCE</a:t>
             </a:r>
           </a:p>
           <a:p>

--- a/outputs/L.B._strategie_innovation.pptx
+++ b/outputs/L.B._strategie_innovation.pptx
@@ -7,6 +7,9 @@
   <p:sldIdLst>
     <p:sldId id="256" r:id="rId7"/>
     <p:sldId id="257" r:id="rId8"/>
+    <p:sldId id="258" r:id="rId9"/>
+    <p:sldId id="259" r:id="rId10"/>
+    <p:sldId id="260" r:id="rId11"/>
   </p:sldIdLst>
   <p:sldSz cx="12192000" cy="6858000" type="screen4x3"/>
   <p:notesSz cx="6858000" cy="9144000"/>
@@ -3361,7 +3364,7 @@
                 </a:solidFill>
                 <a:latin typeface="Alegreya Sans"/>
               </a:rPr>
-              <a:t>Stratégie &amp; transformation</a:t>
+              <a:t>Stratégie &amp; plans stratégiques à 3 ans</a:t>
             </a:r>
           </a:p>
           <a:p>
@@ -3386,7 +3389,7 @@
                 </a:solidFill>
                 <a:latin typeface="Alegreya Sans"/>
               </a:rPr>
-              <a:t>Innovation &amp; facilitation (intelligence collective)</a:t>
+              <a:t>Gestion de projet &amp; PMO</a:t>
             </a:r>
           </a:p>
           <a:p>
@@ -3411,7 +3414,7 @@
                 </a:solidFill>
                 <a:latin typeface="Alegreya Sans"/>
               </a:rPr>
-              <a:t>Gestion de projet &amp; PMO</a:t>
+              <a:t>Innovation &amp; facilitation (design thinking, double diamant)</a:t>
             </a:r>
           </a:p>
           <a:p>
@@ -3462,6 +3465,56 @@
                 <a:latin typeface="Alegreya Sans"/>
               </a:rPr>
               <a:t>Études de marché &amp; due diligences</a:t>
+            </a:r>
+          </a:p>
+          <a:p>
+            <a:pPr algn="l">
+              <a:spcAft>
+                <a:spcPts val="100"/>
+              </a:spcAft>
+            </a:pPr>
+            <a:r>
+              <a:rPr sz="1200" b="1" i="0">
+                <a:solidFill>
+                  <a:srgbClr val="3AEDE5"/>
+                </a:solidFill>
+                <a:latin typeface="Alegreya Sans"/>
+              </a:rPr>
+              <a:t>•  </a:t>
+            </a:r>
+            <a:r>
+              <a:rPr sz="1200" b="0" i="0">
+                <a:solidFill>
+                  <a:srgbClr val="FFFFFF"/>
+                </a:solidFill>
+                <a:latin typeface="Alegreya Sans"/>
+              </a:rPr>
+              <a:t>Coaching, créativité &amp; neurodiversité</a:t>
+            </a:r>
+          </a:p>
+          <a:p>
+            <a:pPr algn="l">
+              <a:spcAft>
+                <a:spcPts val="100"/>
+              </a:spcAft>
+            </a:pPr>
+            <a:r>
+              <a:rPr sz="1200" b="1" i="0">
+                <a:solidFill>
+                  <a:srgbClr val="3AEDE5"/>
+                </a:solidFill>
+                <a:latin typeface="Alegreya Sans"/>
+              </a:rPr>
+              <a:t>•  </a:t>
+            </a:r>
+            <a:r>
+              <a:rPr sz="1200" b="0" i="0">
+                <a:solidFill>
+                  <a:srgbClr val="FFFFFF"/>
+                </a:solidFill>
+                <a:latin typeface="Alegreya Sans"/>
+              </a:rPr>
+              <a:t>Marketing digital</a:t>
             </a:r>
           </a:p>
           <a:p>
@@ -3616,6 +3669,40 @@
                 <a:latin typeface="Alegreya Sans"/>
               </a:rPr>
               <a:t> — Libérez le pouvoir créatif en entreprise (Amazon KDP)</a:t>
+            </a:r>
+          </a:p>
+          <a:p>
+            <a:pPr algn="l">
+              <a:spcAft>
+                <a:spcPts val="200"/>
+              </a:spcAft>
+            </a:pPr>
+            <a:r>
+              <a:rPr sz="1200" b="1" i="0">
+                <a:solidFill>
+                  <a:srgbClr val="3AEDE5"/>
+                </a:solidFill>
+                <a:latin typeface="Alegreya Sans"/>
+              </a:rPr>
+              <a:t>• </a:t>
+            </a:r>
+            <a:r>
+              <a:rPr sz="1200" b="1" i="0">
+                <a:solidFill>
+                  <a:srgbClr val="FFFFFF"/>
+                </a:solidFill>
+                <a:latin typeface="Alegreya Sans"/>
+              </a:rPr>
+              <a:t>Créatrice d'un talk show</a:t>
+            </a:r>
+            <a:r>
+              <a:rPr sz="1200" b="0" i="1">
+                <a:solidFill>
+                  <a:srgbClr val="CCD6E8"/>
+                </a:solidFill>
+                <a:latin typeface="Alegreya Sans"/>
+              </a:rPr>
+              <a:t> — Transformation des organisations, leadership et innovation — 23 talks tournés</a:t>
             </a:r>
           </a:p>
         </p:txBody>
@@ -3670,7 +3757,7 @@
                 </a:solidFill>
                 <a:latin typeface="Alegreya Sans"/>
               </a:rPr>
-              <a:t>10 ans en conseil en stratégie (L.E.K., EY-Parthenon) et développement, aujourd'hui fondatrice et experte en créativité, intelligence collective et neurodiversité. De la stratégie à la facilitation, du cadrage à la mise en œuvre.</a:t>
+              <a:t>10 ans d'expérience en conseil en stratégie (L.E.K., EY-Parthenon) et en développement, aujourd'hui fondatrice et experte en créativité, intelligence collective et neurodiversité. Intervient sur la stratégie, la transformation, l'innovation et la facilitation, du cadrage à la mise en œuvre, pour des grands groupes comme pour des fonds de Private Equity.</a:t>
             </a:r>
           </a:p>
           <a:p>
@@ -3723,7 +3810,7 @@
                 </a:solidFill>
                 <a:latin typeface="Alegreya Sans"/>
               </a:rPr>
-              <a:t> — Fondatrice — Experte créativité &amp; intelligence collective</a:t>
+              <a:t> — Fondatrice — Experte créativité, intelligence collective &amp; neurodiversité</a:t>
             </a:r>
             <a:r>
               <a:rPr sz="1200" b="0" i="1">
@@ -3757,7 +3844,7 @@
                 </a:solidFill>
                 <a:latin typeface="Alegreya Sans"/>
               </a:rPr>
-              <a:t>Conférencière ; facilitation d'ateliers d'innovation et de neurodiversité pour Orange, Renault Alpine, EDF.</a:t>
+              <a:t>Conférences et ateliers autour de la créativité et de l'innovation : préparation du contenu et animation pour des indépendants, réseaux d'alumni et d'entrepreneurs.</a:t>
             </a:r>
           </a:p>
           <a:p>
@@ -3782,50 +3869,7 @@
                 </a:solidFill>
                 <a:latin typeface="Alegreya Sans"/>
               </a:rPr>
-              <a:t>Création et animation d'un talk show sur la transformation, le leadership et l'innovation (23 talks tournés).</a:t>
-            </a:r>
-          </a:p>
-          <a:p>
-            <a:pPr algn="l">
-              <a:spcAft>
-                <a:spcPts val="100"/>
-              </a:spcAft>
-            </a:pPr>
-            <a:r>
-              <a:rPr sz="1200" b="1" i="0">
-                <a:solidFill>
-                  <a:srgbClr val="3AEDE5"/>
-                </a:solidFill>
-                <a:latin typeface="Alegreya Sans"/>
-              </a:rPr>
-              <a:t>▸ </a:t>
-            </a:r>
-            <a:r>
-              <a:rPr sz="1200" b="1" i="0">
-                <a:solidFill>
-                  <a:srgbClr val="FFFFFF"/>
-                </a:solidFill>
-                <a:latin typeface="Alegreya Sans"/>
-              </a:rPr>
-              <a:t>Consultant Indépendant — Stratégie &amp; Innovation</a:t>
-            </a:r>
-            <a:r>
-              <a:rPr sz="1200" b="0" i="0">
-                <a:solidFill>
-                  <a:srgbClr val="FFFFFF"/>
-                </a:solidFill>
-                <a:latin typeface="Alegreya Sans"/>
-              </a:rPr>
-              <a:t> — Missions grands comptes &amp; Private Equity</a:t>
-            </a:r>
-            <a:r>
-              <a:rPr sz="1200" b="0" i="1">
-                <a:solidFill>
-                  <a:srgbClr val="3AEDE5"/>
-                </a:solidFill>
-                <a:latin typeface="Alegreya Sans"/>
-              </a:rPr>
-              <a:t>  (Depuis 2022)</a:t>
+              <a:t>Rédaction et édition d'un livre sur la créativité en entreprise : 20+ entretiens qualitatifs, conception mêlant conte, introspection, ateliers d'intelligence collective et analyses business (co-création avec IA génératives), publication et promotion.</a:t>
             </a:r>
           </a:p>
           <a:p>
@@ -3850,218 +3894,7 @@
                 </a:solidFill>
                 <a:latin typeface="Alegreya Sans"/>
               </a:rPr>
-              <a:t>Stratégie grands comptes : LVMH (IA générative, seconde main), Pluxee (31 pays), Carrefour, Sodexo, Novoferm (plans à 3 ans).</a:t>
-            </a:r>
-          </a:p>
-          <a:p>
-            <a:pPr algn="l" lvl="1">
-              <a:spcAft>
-                <a:spcPts val="100"/>
-              </a:spcAft>
-            </a:pPr>
-            <a:r>
-              <a:rPr sz="1200" b="1" i="0">
-                <a:solidFill>
-                  <a:srgbClr val="3AEDE5"/>
-                </a:solidFill>
-                <a:latin typeface="Alegreya Sans"/>
-              </a:rPr>
-              <a:t>•  </a:t>
-            </a:r>
-            <a:r>
-              <a:rPr sz="1200" b="0" i="0">
-                <a:solidFill>
-                  <a:srgbClr val="FFFFFF"/>
-                </a:solidFill>
-                <a:latin typeface="Alegreya Sans"/>
-              </a:rPr>
-              <a:t>Due diligences Private Equity (~10 cibles : Gerflor, Mecatherm, Revima, Liérac…) : entretiens experts, analyses de marché, mapping des achats.</a:t>
-            </a:r>
-          </a:p>
-          <a:p>
-            <a:pPr algn="l">
-              <a:spcAft>
-                <a:spcPts val="100"/>
-              </a:spcAft>
-            </a:pPr>
-            <a:r>
-              <a:rPr sz="1200" b="1" i="0">
-                <a:solidFill>
-                  <a:srgbClr val="3AEDE5"/>
-                </a:solidFill>
-                <a:latin typeface="Alegreya Sans"/>
-              </a:rPr>
-              <a:t>▸ </a:t>
-            </a:r>
-            <a:r>
-              <a:rPr sz="1200" b="1" i="0">
-                <a:solidFill>
-                  <a:srgbClr val="FFFFFF"/>
-                </a:solidFill>
-                <a:latin typeface="Alegreya Sans"/>
-              </a:rPr>
-              <a:t>Othentik — Conseil en innovation</a:t>
-            </a:r>
-            <a:r>
-              <a:rPr sz="1200" b="0" i="0">
-                <a:solidFill>
-                  <a:srgbClr val="FFFFFF"/>
-                </a:solidFill>
-                <a:latin typeface="Alegreya Sans"/>
-              </a:rPr>
-              <a:t> — Head of Strategy and Operations (freelance)</a:t>
-            </a:r>
-            <a:r>
-              <a:rPr sz="1200" b="0" i="1">
-                <a:solidFill>
-                  <a:srgbClr val="3AEDE5"/>
-                </a:solidFill>
-                <a:latin typeface="Alegreya Sans"/>
-              </a:rPr>
-              <a:t>  (2023 — 2024)</a:t>
-            </a:r>
-          </a:p>
-          <a:p>
-            <a:pPr algn="l" lvl="1">
-              <a:spcAft>
-                <a:spcPts val="100"/>
-              </a:spcAft>
-            </a:pPr>
-            <a:r>
-              <a:rPr sz="1200" b="1" i="0">
-                <a:solidFill>
-                  <a:srgbClr val="3AEDE5"/>
-                </a:solidFill>
-                <a:latin typeface="Alegreya Sans"/>
-              </a:rPr>
-              <a:t>•  </a:t>
-            </a:r>
-            <a:r>
-              <a:rPr sz="1200" b="0" i="0">
-                <a:solidFill>
-                  <a:srgbClr val="FFFFFF"/>
-                </a:solidFill>
-                <a:latin typeface="Alegreya Sans"/>
-              </a:rPr>
-              <a:t>Définition de la roadmap 2024 et du business plan, de la stratégie commerciale, du positionnement et des offres.</a:t>
-            </a:r>
-          </a:p>
-          <a:p>
-            <a:pPr algn="l" lvl="1">
-              <a:spcAft>
-                <a:spcPts val="100"/>
-              </a:spcAft>
-            </a:pPr>
-            <a:r>
-              <a:rPr sz="1200" b="1" i="0">
-                <a:solidFill>
-                  <a:srgbClr val="3AEDE5"/>
-                </a:solidFill>
-                <a:latin typeface="Alegreya Sans"/>
-              </a:rPr>
-              <a:t>•  </a:t>
-            </a:r>
-            <a:r>
-              <a:rPr sz="1200" b="0" i="0">
-                <a:solidFill>
-                  <a:srgbClr val="FFFFFF"/>
-                </a:solidFill>
-                <a:latin typeface="Alegreya Sans"/>
-              </a:rPr>
-              <a:t>Co-création de la méthode d'innovation « The Othentik Way » ; facilitation d'ateliers d'innovation.</a:t>
-            </a:r>
-          </a:p>
-          <a:p>
-            <a:pPr algn="l">
-              <a:spcAft>
-                <a:spcPts val="100"/>
-              </a:spcAft>
-            </a:pPr>
-            <a:r>
-              <a:rPr sz="1200" b="1" i="0">
-                <a:solidFill>
-                  <a:srgbClr val="3AEDE5"/>
-                </a:solidFill>
-                <a:latin typeface="Alegreya Sans"/>
-              </a:rPr>
-              <a:t>▸ </a:t>
-            </a:r>
-            <a:r>
-              <a:rPr sz="1200" b="1" i="0">
-                <a:solidFill>
-                  <a:srgbClr val="FFFFFF"/>
-                </a:solidFill>
-                <a:latin typeface="Alegreya Sans"/>
-              </a:rPr>
-              <a:t>Renovation Man — Proptech</a:t>
-            </a:r>
-            <a:r>
-              <a:rPr sz="1200" b="0" i="0">
-                <a:solidFill>
-                  <a:srgbClr val="FFFFFF"/>
-                </a:solidFill>
-                <a:latin typeface="Alegreya Sans"/>
-              </a:rPr>
-              <a:t> — Head of Strategic Partnerships</a:t>
-            </a:r>
-            <a:r>
-              <a:rPr sz="1200" b="0" i="1">
-                <a:solidFill>
-                  <a:srgbClr val="3AEDE5"/>
-                </a:solidFill>
-                <a:latin typeface="Alegreya Sans"/>
-              </a:rPr>
-              <a:t>  (2019 — 2022)</a:t>
-            </a:r>
-          </a:p>
-          <a:p>
-            <a:pPr algn="l" lvl="1">
-              <a:spcAft>
-                <a:spcPts val="100"/>
-              </a:spcAft>
-            </a:pPr>
-            <a:r>
-              <a:rPr sz="1200" b="1" i="0">
-                <a:solidFill>
-                  <a:srgbClr val="3AEDE5"/>
-                </a:solidFill>
-                <a:latin typeface="Alegreya Sans"/>
-              </a:rPr>
-              <a:t>•  </a:t>
-            </a:r>
-            <a:r>
-              <a:rPr sz="1200" b="0" i="0">
-                <a:solidFill>
-                  <a:srgbClr val="FFFFFF"/>
-                </a:solidFill>
-                <a:latin typeface="Alegreya Sans"/>
-              </a:rPr>
-              <a:t>Structuration du pôle partenariat et de la stratégie de développement : nombre de partenaires ×6, demandes clients ×10.</a:t>
-            </a:r>
-          </a:p>
-          <a:p>
-            <a:pPr algn="l" lvl="1">
-              <a:spcAft>
-                <a:spcPts val="100"/>
-              </a:spcAft>
-            </a:pPr>
-            <a:r>
-              <a:rPr sz="1200" b="1" i="0">
-                <a:solidFill>
-                  <a:srgbClr val="3AEDE5"/>
-                </a:solidFill>
-                <a:latin typeface="Alegreya Sans"/>
-              </a:rPr>
-              <a:t>•  </a:t>
-            </a:r>
-            <a:r>
-              <a:rPr sz="1200" b="0" i="0">
-                <a:solidFill>
-                  <a:srgbClr val="FFFFFF"/>
-                </a:solidFill>
-                <a:latin typeface="Alegreya Sans"/>
-              </a:rPr>
-              <a:t>Parcours de prescription (conseillers LCL : demandes ×3) et offres partenaires (Mon Chasseur Immo, Rhinov).</a:t>
+              <a:t>Création et animation d'un talk show sur la transformation des organisations, le leadership et l'innovation — 23 talks tournés à date.</a:t>
             </a:r>
           </a:p>
         </p:txBody>
@@ -4355,7 +4188,7 @@
                 </a:solidFill>
                 <a:latin typeface="Alegreya Sans"/>
               </a:rPr>
-              <a:t>Strategy &amp; Innovation Consultant</a:t>
+              <a:t>Consultante Stratégie &amp; Innovation (suite)</a:t>
             </a:r>
           </a:p>
           <a:p>
@@ -4371,7 +4204,7 @@
                 </a:solidFill>
                 <a:latin typeface="Alegreya Sans"/>
               </a:rPr>
-              <a:t>Strategy, transformation &amp; collective intelligence — Retail, Luxury, Health, FMCG</a:t>
+              <a:t>Stratégie, transformation &amp; intelligence collective — Retail, Luxe, Santé, FMCG</a:t>
             </a:r>
           </a:p>
         </p:txBody>
@@ -4410,7 +4243,7 @@
                 </a:solidFill>
                 <a:latin typeface="Alegreya Sans"/>
               </a:rPr>
-              <a:t>MAIN AREAS OF EXPERTISE</a:t>
+              <a:t>DOMAINES D'EXPERTISE</a:t>
             </a:r>
           </a:p>
           <a:p>
@@ -4435,7 +4268,7 @@
                 </a:solidFill>
                 <a:latin typeface="Alegreya Sans"/>
               </a:rPr>
-              <a:t>Strategy &amp; transformation</a:t>
+              <a:t>Stratégie &amp; plans stratégiques à 3 ans</a:t>
             </a:r>
           </a:p>
           <a:p>
@@ -4460,7 +4293,7 @@
                 </a:solidFill>
                 <a:latin typeface="Alegreya Sans"/>
               </a:rPr>
-              <a:t>Innovation &amp; facilitation (collective intelligence)</a:t>
+              <a:t>Gestion de projet &amp; PMO</a:t>
             </a:r>
           </a:p>
           <a:p>
@@ -4485,7 +4318,7 @@
                 </a:solidFill>
                 <a:latin typeface="Alegreya Sans"/>
               </a:rPr>
-              <a:t>Project management &amp; PMO</a:t>
+              <a:t>Innovation &amp; facilitation (design thinking, double diamant)</a:t>
             </a:r>
           </a:p>
           <a:p>
@@ -4510,7 +4343,7 @@
                 </a:solidFill>
                 <a:latin typeface="Alegreya Sans"/>
               </a:rPr>
-              <a:t>Business development &amp; partnerships</a:t>
+              <a:t>Business développement &amp; partenariats</a:t>
             </a:r>
           </a:p>
           <a:p>
@@ -4535,26 +4368,32 @@
                 </a:solidFill>
                 <a:latin typeface="Alegreya Sans"/>
               </a:rPr>
-              <a:t>Market studies &amp; due diligence</a:t>
+              <a:t>Études de marché &amp; due diligences</a:t>
             </a:r>
           </a:p>
           <a:p>
             <a:pPr algn="l">
-              <a:spcBef>
-                <a:spcPts val="600"/>
-              </a:spcBef>
-              <a:spcAft>
-                <a:spcPts val="300"/>
-              </a:spcAft>
-            </a:pPr>
-            <a:r>
-              <a:rPr sz="1300" b="1" i="0">
-                <a:solidFill>
-                  <a:srgbClr val="3AEDE5"/>
-                </a:solidFill>
-                <a:latin typeface="Alegreya Sans"/>
-              </a:rPr>
-              <a:t>EDUCATION &amp; CERTIFICATIONS</a:t>
+              <a:spcAft>
+                <a:spcPts val="100"/>
+              </a:spcAft>
+            </a:pPr>
+            <a:r>
+              <a:rPr sz="1200" b="1" i="0">
+                <a:solidFill>
+                  <a:srgbClr val="3AEDE5"/>
+                </a:solidFill>
+                <a:latin typeface="Alegreya Sans"/>
+              </a:rPr>
+              <a:t>•  </a:t>
+            </a:r>
+            <a:r>
+              <a:rPr sz="1200" b="0" i="0">
+                <a:solidFill>
+                  <a:srgbClr val="FFFFFF"/>
+                </a:solidFill>
+                <a:latin typeface="Alegreya Sans"/>
+              </a:rPr>
+              <a:t>Coaching, créativité &amp; neurodiversité</a:t>
             </a:r>
           </a:p>
           <a:p>
@@ -4570,126 +4409,16 @@
                 </a:solidFill>
                 <a:latin typeface="Alegreya Sans"/>
               </a:rPr>
-              <a:t>2015  </a:t>
-            </a:r>
-            <a:r>
-              <a:rPr sz="1200" b="1" i="0">
-                <a:solidFill>
-                  <a:srgbClr val="FFFFFF"/>
-                </a:solidFill>
-                <a:latin typeface="Alegreya Sans"/>
-              </a:rPr>
-              <a:t>EMLYON Business School</a:t>
-            </a:r>
-          </a:p>
-          <a:p>
-            <a:pPr algn="l">
-              <a:spcAft>
-                <a:spcPts val="300"/>
-              </a:spcAft>
-            </a:pPr>
-            <a:r>
-              <a:rPr sz="1200" b="0" i="1">
-                <a:solidFill>
-                  <a:srgbClr val="CCD6E8"/>
-                </a:solidFill>
-                <a:latin typeface="Alegreya Sans"/>
-              </a:rPr>
-              <a:t>Grande École Programme</a:t>
-            </a:r>
-          </a:p>
-          <a:p>
-            <a:pPr algn="l">
-              <a:spcAft>
-                <a:spcPts val="100"/>
-              </a:spcAft>
-            </a:pPr>
-            <a:r>
-              <a:rPr sz="1200" b="1" i="0">
-                <a:solidFill>
-                  <a:srgbClr val="3AEDE5"/>
-                </a:solidFill>
-                <a:latin typeface="Alegreya Sans"/>
-              </a:rPr>
-              <a:t>2023  </a:t>
-            </a:r>
-            <a:r>
-              <a:rPr sz="1200" b="1" i="0">
-                <a:solidFill>
-                  <a:srgbClr val="FFFFFF"/>
-                </a:solidFill>
-                <a:latin typeface="Alegreya Sans"/>
-              </a:rPr>
-              <a:t>Coaching Ways</a:t>
-            </a:r>
-          </a:p>
-          <a:p>
-            <a:pPr algn="l">
-              <a:spcAft>
-                <a:spcPts val="300"/>
-              </a:spcAft>
-            </a:pPr>
-            <a:r>
-              <a:rPr sz="1200" b="0" i="1">
-                <a:solidFill>
-                  <a:srgbClr val="CCD6E8"/>
-                </a:solidFill>
-                <a:latin typeface="Alegreya Sans"/>
-              </a:rPr>
-              <a:t>Certified Coach</a:t>
-            </a:r>
-          </a:p>
-          <a:p>
-            <a:pPr algn="l">
-              <a:spcBef>
-                <a:spcPts val="600"/>
-              </a:spcBef>
-              <a:spcAft>
-                <a:spcPts val="300"/>
-              </a:spcAft>
-            </a:pPr>
-            <a:r>
-              <a:rPr sz="1300" b="1" i="0">
-                <a:solidFill>
-                  <a:srgbClr val="3AEDE5"/>
-                </a:solidFill>
-                <a:latin typeface="Alegreya Sans"/>
-              </a:rPr>
-              <a:t>ENGAGEMENTS &amp; ACHIEVEMENTS</a:t>
-            </a:r>
-          </a:p>
-          <a:p>
-            <a:pPr algn="l">
-              <a:spcAft>
-                <a:spcPts val="200"/>
-              </a:spcAft>
-            </a:pPr>
-            <a:r>
-              <a:rPr sz="1200" b="1" i="0">
-                <a:solidFill>
-                  <a:srgbClr val="3AEDE5"/>
-                </a:solidFill>
-                <a:latin typeface="Alegreya Sans"/>
-              </a:rPr>
-              <a:t>• </a:t>
-            </a:r>
-            <a:r>
-              <a:rPr sz="1200" b="1" i="0">
-                <a:solidFill>
-                  <a:srgbClr val="FFFFFF"/>
-                </a:solidFill>
-                <a:latin typeface="Alegreya Sans"/>
-              </a:rPr>
-              <a:t>Author — 'À la poursuite du Phaos'</a:t>
-            </a:r>
-            <a:r>
-              <a:rPr sz="1200" b="0" i="1">
-                <a:solidFill>
-                  <a:srgbClr val="CCD6E8"/>
-                </a:solidFill>
-                <a:latin typeface="Alegreya Sans"/>
-              </a:rPr>
-              <a:t> — Unlocking creative power in business (Amazon KDP)</a:t>
+              <a:t>•  </a:t>
+            </a:r>
+            <a:r>
+              <a:rPr sz="1200" b="0" i="0">
+                <a:solidFill>
+                  <a:srgbClr val="FFFFFF"/>
+                </a:solidFill>
+                <a:latin typeface="Alegreya Sans"/>
+              </a:rPr>
+              <a:t>Marketing digital</a:t>
             </a:r>
           </a:p>
         </p:txBody>
@@ -4728,42 +4457,218 @@
                 </a:solidFill>
                 <a:latin typeface="Alegreya Sans"/>
               </a:rPr>
-              <a:t>SUMMARY</a:t>
+              <a:t>PRINCIPALES EXPÉRIENCES PROFESSIONNELLES (suite)</a:t>
             </a:r>
           </a:p>
           <a:p>
             <a:pPr algn="l">
               <a:spcAft>
-                <a:spcPts val="300"/>
-              </a:spcAft>
-            </a:pPr>
-            <a:r>
-              <a:rPr sz="1200" b="0" i="0">
-                <a:solidFill>
-                  <a:srgbClr val="FFFFFF"/>
-                </a:solidFill>
-                <a:latin typeface="Alegreya Sans"/>
-              </a:rPr>
-              <a:t>10 years in strategy consulting (L.E.K., EY-Parthenon) and business development, now a founder and expert in creativity, collective intelligence and neurodiversity. From strategy to facilitation, from framing to implementation.</a:t>
+                <a:spcPts val="100"/>
+              </a:spcAft>
+            </a:pPr>
+            <a:r>
+              <a:rPr sz="1200" b="1" i="0">
+                <a:solidFill>
+                  <a:srgbClr val="3AEDE5"/>
+                </a:solidFill>
+                <a:latin typeface="Alegreya Sans"/>
+              </a:rPr>
+              <a:t>▸ </a:t>
+            </a:r>
+            <a:r>
+              <a:rPr sz="1200" b="1" i="0">
+                <a:solidFill>
+                  <a:srgbClr val="FFFFFF"/>
+                </a:solidFill>
+                <a:latin typeface="Alegreya Sans"/>
+              </a:rPr>
+              <a:t>Othentik — Conseil en innovation</a:t>
+            </a:r>
+            <a:r>
+              <a:rPr sz="1200" b="0" i="0">
+                <a:solidFill>
+                  <a:srgbClr val="FFFFFF"/>
+                </a:solidFill>
+                <a:latin typeface="Alegreya Sans"/>
+              </a:rPr>
+              <a:t> — Head of Strategy and Operations (freelance)</a:t>
+            </a:r>
+            <a:r>
+              <a:rPr sz="1200" b="0" i="1">
+                <a:solidFill>
+                  <a:srgbClr val="3AEDE5"/>
+                </a:solidFill>
+                <a:latin typeface="Alegreya Sans"/>
+              </a:rPr>
+              <a:t>  (2023 — 2024 · 1 an)</a:t>
+            </a:r>
+          </a:p>
+          <a:p>
+            <a:pPr algn="l" lvl="1">
+              <a:spcAft>
+                <a:spcPts val="100"/>
+              </a:spcAft>
+            </a:pPr>
+            <a:r>
+              <a:rPr sz="1200" b="1" i="0">
+                <a:solidFill>
+                  <a:srgbClr val="3AEDE5"/>
+                </a:solidFill>
+                <a:latin typeface="Alegreya Sans"/>
+              </a:rPr>
+              <a:t>•  </a:t>
+            </a:r>
+            <a:r>
+              <a:rPr sz="1200" b="0" i="0">
+                <a:solidFill>
+                  <a:srgbClr val="FFFFFF"/>
+                </a:solidFill>
+                <a:latin typeface="Alegreya Sans"/>
+              </a:rPr>
+              <a:t>Définition de la roadmap 2024 et du business plan, de la stratégie commerciale, du positionnement et de la proposition de valeur, structuration des offres.</a:t>
+            </a:r>
+          </a:p>
+          <a:p>
+            <a:pPr algn="l" lvl="1">
+              <a:spcAft>
+                <a:spcPts val="100"/>
+              </a:spcAft>
+            </a:pPr>
+            <a:r>
+              <a:rPr sz="1200" b="1" i="0">
+                <a:solidFill>
+                  <a:srgbClr val="3AEDE5"/>
+                </a:solidFill>
+                <a:latin typeface="Alegreya Sans"/>
+              </a:rPr>
+              <a:t>•  </a:t>
+            </a:r>
+            <a:r>
+              <a:rPr sz="1200" b="0" i="0">
+                <a:solidFill>
+                  <a:srgbClr val="FFFFFF"/>
+                </a:solidFill>
+                <a:latin typeface="Alegreya Sans"/>
+              </a:rPr>
+              <a:t>Participation à la création de la méthode d'innovation « The Othentik Way » et définition de la politique RH.</a:t>
+            </a:r>
+          </a:p>
+          <a:p>
+            <a:pPr algn="l" lvl="1">
+              <a:spcAft>
+                <a:spcPts val="100"/>
+              </a:spcAft>
+            </a:pPr>
+            <a:r>
+              <a:rPr sz="1200" b="1" i="0">
+                <a:solidFill>
+                  <a:srgbClr val="3AEDE5"/>
+                </a:solidFill>
+                <a:latin typeface="Alegreya Sans"/>
+              </a:rPr>
+              <a:t>•  </a:t>
+            </a:r>
+            <a:r>
+              <a:rPr sz="1200" b="0" i="0">
+                <a:solidFill>
+                  <a:srgbClr val="FFFFFF"/>
+                </a:solidFill>
+                <a:latin typeface="Alegreya Sans"/>
+              </a:rPr>
+              <a:t>Facilitation d'ateliers d'innovation : préparation (objectifs, supports, livrables) et animation d'ateliers et de conférences autour de la neurodiversité et de l'innovation pour Orange, Renault Alpine, EDF et des initiatives internes.</a:t>
             </a:r>
           </a:p>
           <a:p>
             <a:pPr algn="l">
-              <a:spcBef>
-                <a:spcPts val="600"/>
-              </a:spcBef>
-              <a:spcAft>
-                <a:spcPts val="300"/>
-              </a:spcAft>
-            </a:pPr>
-            <a:r>
-              <a:rPr sz="1300" b="1" i="0">
-                <a:solidFill>
-                  <a:srgbClr val="3AEDE5"/>
-                </a:solidFill>
-                <a:latin typeface="Alegreya Sans"/>
-              </a:rPr>
-              <a:t>MAIN PROFESSIONAL EXPERIENCE</a:t>
+              <a:spcAft>
+                <a:spcPts val="100"/>
+              </a:spcAft>
+            </a:pPr>
+            <a:r>
+              <a:rPr sz="1200" b="1" i="0">
+                <a:solidFill>
+                  <a:srgbClr val="3AEDE5"/>
+                </a:solidFill>
+                <a:latin typeface="Alegreya Sans"/>
+              </a:rPr>
+              <a:t>▸ </a:t>
+            </a:r>
+            <a:r>
+              <a:rPr sz="1200" b="1" i="0">
+                <a:solidFill>
+                  <a:srgbClr val="FFFFFF"/>
+                </a:solidFill>
+                <a:latin typeface="Alegreya Sans"/>
+              </a:rPr>
+              <a:t>Pluxee (Sodexo BRS) — Retail</a:t>
+            </a:r>
+            <a:r>
+              <a:rPr sz="1200" b="0" i="0">
+                <a:solidFill>
+                  <a:srgbClr val="FFFFFF"/>
+                </a:solidFill>
+                <a:latin typeface="Alegreya Sans"/>
+              </a:rPr>
+              <a:t> — Bras-droit de la SVP Strategy, Product and Customer Experience</a:t>
+            </a:r>
+            <a:r>
+              <a:rPr sz="1200" b="0" i="1">
+                <a:solidFill>
+                  <a:srgbClr val="3AEDE5"/>
+                </a:solidFill>
+                <a:latin typeface="Alegreya Sans"/>
+              </a:rPr>
+              <a:t>  (4 mois)</a:t>
+            </a:r>
+          </a:p>
+          <a:p>
+            <a:pPr algn="l" lvl="1">
+              <a:spcAft>
+                <a:spcPts val="100"/>
+              </a:spcAft>
+            </a:pPr>
+            <a:r>
+              <a:rPr sz="1200" b="1" i="0">
+                <a:solidFill>
+                  <a:srgbClr val="3AEDE5"/>
+                </a:solidFill>
+                <a:latin typeface="Alegreya Sans"/>
+              </a:rPr>
+              <a:t>•  </a:t>
+            </a:r>
+            <a:r>
+              <a:rPr sz="1200" b="0" i="0">
+                <a:solidFill>
+                  <a:srgbClr val="FFFFFF"/>
+                </a:solidFill>
+                <a:latin typeface="Alegreya Sans"/>
+              </a:rPr>
+              <a:t>Accompagnement du processus de planification stratégique pour 31 pays : plans de travail, coordination des parties prenantes, consolidation des plans, préparation des retours Comex aux pays.</a:t>
+            </a:r>
+          </a:p>
+          <a:p>
+            <a:pPr algn="l" lvl="1">
+              <a:spcAft>
+                <a:spcPts val="100"/>
+              </a:spcAft>
+            </a:pPr>
+            <a:r>
+              <a:rPr sz="1200" b="1" i="0">
+                <a:solidFill>
+                  <a:srgbClr val="3AEDE5"/>
+                </a:solidFill>
+                <a:latin typeface="Alegreya Sans"/>
+              </a:rPr>
+              <a:t>•  </a:t>
+            </a:r>
+            <a:r>
+              <a:rPr sz="1200" b="0" i="0">
+                <a:solidFill>
+                  <a:srgbClr val="FFFFFF"/>
+                </a:solidFill>
+                <a:latin typeface="Alegreya Sans"/>
+              </a:rPr>
+              <a:t>Revue des budgets globaux et pays, suivi de l'exécution de la stratégie pour le Comex Sodexo BRS et le Board Groupe ; définition de deux appels d'offres et onboarding du nouveau Strategy Manager.</a:t>
             </a:r>
           </a:p>
           <a:p>
@@ -4788,16 +4693,16 @@
                 </a:solidFill>
                 <a:latin typeface="Alegreya Sans"/>
               </a:rPr>
-              <a:t>On the Move / École du Potentiel Humain</a:t>
-            </a:r>
-            <a:r>
-              <a:rPr sz="1200" b="0" i="0">
-                <a:solidFill>
-                  <a:srgbClr val="FFFFFF"/>
-                </a:solidFill>
-                <a:latin typeface="Alegreya Sans"/>
-              </a:rPr>
-              <a:t> — Founder — Creativity &amp; Collective-Intelligence Expert</a:t>
+              <a:t>LVMH — Luxe</a:t>
+            </a:r>
+            <a:r>
+              <a:rPr sz="1200" b="0" i="0">
+                <a:solidFill>
+                  <a:srgbClr val="FFFFFF"/>
+                </a:solidFill>
+                <a:latin typeface="Alegreya Sans"/>
+              </a:rPr>
+              <a:t> — Strategic Insights Program Manager</a:t>
             </a:r>
             <a:r>
               <a:rPr sz="1200" b="0" i="1">
@@ -4806,7 +4711,7 @@
                 </a:solidFill>
                 <a:latin typeface="Alegreya Sans"/>
               </a:rPr>
-              <a:t>  (Since 2024)</a:t>
+              <a:t>  (4 mois)</a:t>
             </a:r>
           </a:p>
           <a:p>
@@ -4831,7 +4736,7 @@
                 </a:solidFill>
                 <a:latin typeface="Alegreya Sans"/>
               </a:rPr>
-              <a:t>Speaker; facilitation of innovation and neurodiversity workshops for Orange, Renault Alpine, EDF.</a:t>
+              <a:t>Cadrage de deux études stratégiques : impact de l'IA générative dans le secteur du luxe et marché de la seconde main.</a:t>
             </a:r>
           </a:p>
           <a:p>
@@ -4856,286 +4761,7 @@
                 </a:solidFill>
                 <a:latin typeface="Alegreya Sans"/>
               </a:rPr>
-              <a:t>Created and hosts a talk show on transformation, leadership and innovation (23 episodes filmed).</a:t>
-            </a:r>
-          </a:p>
-          <a:p>
-            <a:pPr algn="l">
-              <a:spcAft>
-                <a:spcPts val="100"/>
-              </a:spcAft>
-            </a:pPr>
-            <a:r>
-              <a:rPr sz="1200" b="1" i="0">
-                <a:solidFill>
-                  <a:srgbClr val="3AEDE5"/>
-                </a:solidFill>
-                <a:latin typeface="Alegreya Sans"/>
-              </a:rPr>
-              <a:t>▸ </a:t>
-            </a:r>
-            <a:r>
-              <a:rPr sz="1200" b="1" i="0">
-                <a:solidFill>
-                  <a:srgbClr val="FFFFFF"/>
-                </a:solidFill>
-                <a:latin typeface="Alegreya Sans"/>
-              </a:rPr>
-              <a:t>Independent Consultant — Strategy &amp; Innovation</a:t>
-            </a:r>
-            <a:r>
-              <a:rPr sz="1200" b="0" i="0">
-                <a:solidFill>
-                  <a:srgbClr val="FFFFFF"/>
-                </a:solidFill>
-                <a:latin typeface="Alegreya Sans"/>
-              </a:rPr>
-              <a:t> — Large-account &amp; Private Equity missions</a:t>
-            </a:r>
-            <a:r>
-              <a:rPr sz="1200" b="0" i="1">
-                <a:solidFill>
-                  <a:srgbClr val="3AEDE5"/>
-                </a:solidFill>
-                <a:latin typeface="Alegreya Sans"/>
-              </a:rPr>
-              <a:t>  (Since 2022)</a:t>
-            </a:r>
-          </a:p>
-          <a:p>
-            <a:pPr algn="l" lvl="1">
-              <a:spcAft>
-                <a:spcPts val="100"/>
-              </a:spcAft>
-            </a:pPr>
-            <a:r>
-              <a:rPr sz="1200" b="1" i="0">
-                <a:solidFill>
-                  <a:srgbClr val="3AEDE5"/>
-                </a:solidFill>
-                <a:latin typeface="Alegreya Sans"/>
-              </a:rPr>
-              <a:t>•  </a:t>
-            </a:r>
-            <a:r>
-              <a:rPr sz="1200" b="0" i="0">
-                <a:solidFill>
-                  <a:srgbClr val="FFFFFF"/>
-                </a:solidFill>
-                <a:latin typeface="Alegreya Sans"/>
-              </a:rPr>
-              <a:t>Strategy for large accounts: LVMH (generative AI, second-hand), Pluxee (31 countries), Carrefour, Sodexo, Novoferm (3-year plans).</a:t>
-            </a:r>
-          </a:p>
-          <a:p>
-            <a:pPr algn="l" lvl="1">
-              <a:spcAft>
-                <a:spcPts val="100"/>
-              </a:spcAft>
-            </a:pPr>
-            <a:r>
-              <a:rPr sz="1200" b="1" i="0">
-                <a:solidFill>
-                  <a:srgbClr val="3AEDE5"/>
-                </a:solidFill>
-                <a:latin typeface="Alegreya Sans"/>
-              </a:rPr>
-              <a:t>•  </a:t>
-            </a:r>
-            <a:r>
-              <a:rPr sz="1200" b="0" i="0">
-                <a:solidFill>
-                  <a:srgbClr val="FFFFFF"/>
-                </a:solidFill>
-                <a:latin typeface="Alegreya Sans"/>
-              </a:rPr>
-              <a:t>Due diligence for PE funds (~10 targets: Gerflor, Mecatherm, Revima, Liérac…): expert interviews, market analyses, purchasing mapping.</a:t>
-            </a:r>
-          </a:p>
-          <a:p>
-            <a:pPr algn="l">
-              <a:spcAft>
-                <a:spcPts val="100"/>
-              </a:spcAft>
-            </a:pPr>
-            <a:r>
-              <a:rPr sz="1200" b="1" i="0">
-                <a:solidFill>
-                  <a:srgbClr val="3AEDE5"/>
-                </a:solidFill>
-                <a:latin typeface="Alegreya Sans"/>
-              </a:rPr>
-              <a:t>▸ </a:t>
-            </a:r>
-            <a:r>
-              <a:rPr sz="1200" b="1" i="0">
-                <a:solidFill>
-                  <a:srgbClr val="FFFFFF"/>
-                </a:solidFill>
-                <a:latin typeface="Alegreya Sans"/>
-              </a:rPr>
-              <a:t>Othentik — Innovation consulting</a:t>
-            </a:r>
-            <a:r>
-              <a:rPr sz="1200" b="0" i="0">
-                <a:solidFill>
-                  <a:srgbClr val="FFFFFF"/>
-                </a:solidFill>
-                <a:latin typeface="Alegreya Sans"/>
-              </a:rPr>
-              <a:t> — Head of Strategy and Operations (freelance)</a:t>
-            </a:r>
-            <a:r>
-              <a:rPr sz="1200" b="0" i="1">
-                <a:solidFill>
-                  <a:srgbClr val="3AEDE5"/>
-                </a:solidFill>
-                <a:latin typeface="Alegreya Sans"/>
-              </a:rPr>
-              <a:t>  (2023 — 2024)</a:t>
-            </a:r>
-          </a:p>
-          <a:p>
-            <a:pPr algn="l" lvl="1">
-              <a:spcAft>
-                <a:spcPts val="100"/>
-              </a:spcAft>
-            </a:pPr>
-            <a:r>
-              <a:rPr sz="1200" b="1" i="0">
-                <a:solidFill>
-                  <a:srgbClr val="3AEDE5"/>
-                </a:solidFill>
-                <a:latin typeface="Alegreya Sans"/>
-              </a:rPr>
-              <a:t>•  </a:t>
-            </a:r>
-            <a:r>
-              <a:rPr sz="1200" b="0" i="0">
-                <a:solidFill>
-                  <a:srgbClr val="FFFFFF"/>
-                </a:solidFill>
-                <a:latin typeface="Alegreya Sans"/>
-              </a:rPr>
-              <a:t>Defined the 2024 roadmap and business plan, the commercial strategy, positioning and offers.</a:t>
-            </a:r>
-          </a:p>
-          <a:p>
-            <a:pPr algn="l" lvl="1">
-              <a:spcAft>
-                <a:spcPts val="100"/>
-              </a:spcAft>
-            </a:pPr>
-            <a:r>
-              <a:rPr sz="1200" b="1" i="0">
-                <a:solidFill>
-                  <a:srgbClr val="3AEDE5"/>
-                </a:solidFill>
-                <a:latin typeface="Alegreya Sans"/>
-              </a:rPr>
-              <a:t>•  </a:t>
-            </a:r>
-            <a:r>
-              <a:rPr sz="1200" b="0" i="0">
-                <a:solidFill>
-                  <a:srgbClr val="FFFFFF"/>
-                </a:solidFill>
-                <a:latin typeface="Alegreya Sans"/>
-              </a:rPr>
-              <a:t>Co-created the 'The Othentik Way' innovation method; facilitation of innovation workshops.</a:t>
-            </a:r>
-          </a:p>
-          <a:p>
-            <a:pPr algn="l">
-              <a:spcAft>
-                <a:spcPts val="100"/>
-              </a:spcAft>
-            </a:pPr>
-            <a:r>
-              <a:rPr sz="1200" b="1" i="0">
-                <a:solidFill>
-                  <a:srgbClr val="3AEDE5"/>
-                </a:solidFill>
-                <a:latin typeface="Alegreya Sans"/>
-              </a:rPr>
-              <a:t>▸ </a:t>
-            </a:r>
-            <a:r>
-              <a:rPr sz="1200" b="1" i="0">
-                <a:solidFill>
-                  <a:srgbClr val="FFFFFF"/>
-                </a:solidFill>
-                <a:latin typeface="Alegreya Sans"/>
-              </a:rPr>
-              <a:t>Renovation Man — Proptech</a:t>
-            </a:r>
-            <a:r>
-              <a:rPr sz="1200" b="0" i="0">
-                <a:solidFill>
-                  <a:srgbClr val="FFFFFF"/>
-                </a:solidFill>
-                <a:latin typeface="Alegreya Sans"/>
-              </a:rPr>
-              <a:t> — Head of Strategic Partnerships</a:t>
-            </a:r>
-            <a:r>
-              <a:rPr sz="1200" b="0" i="1">
-                <a:solidFill>
-                  <a:srgbClr val="3AEDE5"/>
-                </a:solidFill>
-                <a:latin typeface="Alegreya Sans"/>
-              </a:rPr>
-              <a:t>  (2019 — 2022)</a:t>
-            </a:r>
-          </a:p>
-          <a:p>
-            <a:pPr algn="l" lvl="1">
-              <a:spcAft>
-                <a:spcPts val="100"/>
-              </a:spcAft>
-            </a:pPr>
-            <a:r>
-              <a:rPr sz="1200" b="1" i="0">
-                <a:solidFill>
-                  <a:srgbClr val="3AEDE5"/>
-                </a:solidFill>
-                <a:latin typeface="Alegreya Sans"/>
-              </a:rPr>
-              <a:t>•  </a:t>
-            </a:r>
-            <a:r>
-              <a:rPr sz="1200" b="0" i="0">
-                <a:solidFill>
-                  <a:srgbClr val="FFFFFF"/>
-                </a:solidFill>
-                <a:latin typeface="Alegreya Sans"/>
-              </a:rPr>
-              <a:t>Built the partnerships unit and the development strategy: number of partners ×6, customer requests ×10.</a:t>
-            </a:r>
-          </a:p>
-          <a:p>
-            <a:pPr algn="l" lvl="1">
-              <a:spcAft>
-                <a:spcPts val="100"/>
-              </a:spcAft>
-            </a:pPr>
-            <a:r>
-              <a:rPr sz="1200" b="1" i="0">
-                <a:solidFill>
-                  <a:srgbClr val="3AEDE5"/>
-                </a:solidFill>
-                <a:latin typeface="Alegreya Sans"/>
-              </a:rPr>
-              <a:t>•  </a:t>
-            </a:r>
-            <a:r>
-              <a:rPr sz="1200" b="0" i="0">
-                <a:solidFill>
-                  <a:srgbClr val="FFFFFF"/>
-                </a:solidFill>
-                <a:latin typeface="Alegreya Sans"/>
-              </a:rPr>
-              <a:t>Referral journeys (LCL advisors: requests ×3) and partner offers (Mon Chasseur Immo, Rhinov).</a:t>
+              <a:t>Recherches, interviews des parties prenantes au sein de la Holding et des Maisons, rédaction des briefs et sélection du partenaire.</a:t>
             </a:r>
           </a:p>
         </p:txBody>
@@ -5214,7 +4840,2633 @@
                 </a:solidFill>
                 <a:latin typeface="Alegreya Sans"/>
               </a:rPr>
-              <a:t>The information in this document is strictly confidential — This document may only be shared with the owner's consent</a:t>
+              <a:t>Les informations de ce document sont strictement confidentielles — Ce document ne peut être partagé qu'avec l'accord de son propriétaire</a:t>
+            </a:r>
+          </a:p>
+        </p:txBody>
+      </p:sp>
+    </p:spTree>
+  </p:cSld>
+  <p:clrMapOvr>
+    <a:masterClrMapping/>
+  </p:clrMapOvr>
+</p:sld>
+</file>
+
+<file path=ppt/slides/slide3.xml><?xml version="1.0" encoding="utf-8"?>
+<p:sld xmlns:a="http://schemas.openxmlformats.org/drawingml/2006/main" xmlns:p="http://schemas.openxmlformats.org/presentationml/2006/main" xmlns:r="http://schemas.openxmlformats.org/officeDocument/2006/relationships">
+  <p:cSld>
+    <p:spTree>
+      <p:nvGrpSpPr>
+        <p:cNvPr id="1" name=""/>
+        <p:cNvGrpSpPr/>
+        <p:nvPr/>
+      </p:nvGrpSpPr>
+      <p:grpSpPr/>
+      <p:sp>
+        <p:nvSpPr>
+          <p:cNvPr id="2" name="Rectangle 1"/>
+          <p:cNvSpPr/>
+          <p:nvPr/>
+        </p:nvSpPr>
+        <p:spPr>
+          <a:xfrm>
+            <a:off x="0" y="0"/>
+            <a:ext cx="12192000" cy="6858000"/>
+          </a:xfrm>
+          <a:prstGeom prst="rect">
+            <a:avLst/>
+          </a:prstGeom>
+          <a:solidFill>
+            <a:srgbClr val="061A5E"/>
+          </a:solidFill>
+          <a:ln>
+            <a:noFill/>
+          </a:ln>
+          <a:effectLst/>
+        </p:spPr>
+        <p:style>
+          <a:lnRef idx="1">
+            <a:schemeClr val="accent1"/>
+          </a:lnRef>
+          <a:fillRef idx="3">
+            <a:schemeClr val="accent1"/>
+          </a:fillRef>
+          <a:effectRef idx="2">
+            <a:schemeClr val="accent1"/>
+          </a:effectRef>
+          <a:fontRef idx="minor">
+            <a:schemeClr val="lt1"/>
+          </a:fontRef>
+        </p:style>
+        <p:txBody>
+          <a:bodyPr rtlCol="0" anchor="ctr"/>
+          <a:lstStyle/>
+          <a:p>
+            <a:pPr algn="ctr"/>
+          </a:p>
+        </p:txBody>
+      </p:sp>
+      <p:sp>
+        <p:nvSpPr>
+          <p:cNvPr id="3" name="Rectangle 2"/>
+          <p:cNvSpPr/>
+          <p:nvPr/>
+        </p:nvSpPr>
+        <p:spPr>
+          <a:xfrm>
+            <a:off x="4300000" y="0"/>
+            <a:ext cx="15000" cy="6858000"/>
+          </a:xfrm>
+          <a:prstGeom prst="rect">
+            <a:avLst/>
+          </a:prstGeom>
+          <a:solidFill>
+            <a:srgbClr val="3AEDE5"/>
+          </a:solidFill>
+          <a:ln>
+            <a:noFill/>
+          </a:ln>
+          <a:effectLst/>
+        </p:spPr>
+        <p:style>
+          <a:lnRef idx="1">
+            <a:schemeClr val="accent1"/>
+          </a:lnRef>
+          <a:fillRef idx="3">
+            <a:schemeClr val="accent1"/>
+          </a:fillRef>
+          <a:effectRef idx="2">
+            <a:schemeClr val="accent1"/>
+          </a:effectRef>
+          <a:fontRef idx="minor">
+            <a:schemeClr val="lt1"/>
+          </a:fontRef>
+        </p:style>
+        <p:txBody>
+          <a:bodyPr rtlCol="0" anchor="ctr"/>
+          <a:lstStyle/>
+          <a:p>
+            <a:pPr algn="ctr"/>
+          </a:p>
+        </p:txBody>
+      </p:sp>
+      <p:pic>
+        <p:nvPicPr>
+          <p:cNvPr id="4" name="Picture 3" descr="inside_circle_logo.png"/>
+          <p:cNvPicPr>
+            <a:picLocks noChangeAspect="1"/>
+          </p:cNvPicPr>
+          <p:nvPr/>
+        </p:nvPicPr>
+        <p:blipFill>
+          <a:blip r:embed="rId2"/>
+          <a:stretch>
+            <a:fillRect/>
+          </a:stretch>
+        </p:blipFill>
+        <p:spPr>
+          <a:xfrm>
+            <a:off x="10660000" y="130000"/>
+            <a:ext cx="1302000" cy="420000"/>
+          </a:xfrm>
+          <a:prstGeom prst="rect">
+            <a:avLst/>
+          </a:prstGeom>
+        </p:spPr>
+      </p:pic>
+      <p:sp>
+        <p:nvSpPr>
+          <p:cNvPr id="5" name="TextBox 4"/>
+          <p:cNvSpPr txBox="1"/>
+          <p:nvPr/>
+        </p:nvSpPr>
+        <p:spPr>
+          <a:xfrm>
+            <a:off x="228600" y="240000"/>
+            <a:ext cx="3842800" cy="1300000"/>
+          </a:xfrm>
+          <a:prstGeom prst="rect">
+            <a:avLst/>
+          </a:prstGeom>
+          <a:noFill/>
+        </p:spPr>
+        <p:txBody>
+          <a:bodyPr wrap="square" lIns="0" rIns="0" tIns="0" bIns="0">
+            <a:spAutoFit/>
+          </a:bodyPr>
+          <a:lstStyle/>
+          <a:p>
+            <a:pPr algn="l"/>
+            <a:r>
+              <a:rPr sz="2800" b="0" i="0">
+                <a:solidFill>
+                  <a:srgbClr val="3AEDE5"/>
+                </a:solidFill>
+                <a:latin typeface="Alegreya Sans"/>
+              </a:rPr>
+              <a:t>Livia</a:t>
+            </a:r>
+          </a:p>
+          <a:p>
+            <a:pPr>
+              <a:spcBef>
+                <a:spcPts val="0"/>
+              </a:spcBef>
+            </a:pPr>
+            <a:r>
+              <a:rPr sz="3200" b="1" i="0">
+                <a:solidFill>
+                  <a:srgbClr val="3AEDE5"/>
+                </a:solidFill>
+                <a:latin typeface="Alegreya Sans"/>
+              </a:rPr>
+              <a:t>BONHOURE</a:t>
+            </a:r>
+          </a:p>
+        </p:txBody>
+      </p:sp>
+      <p:sp>
+        <p:nvSpPr>
+          <p:cNvPr id="6" name="TextBox 5"/>
+          <p:cNvSpPr txBox="1"/>
+          <p:nvPr/>
+        </p:nvSpPr>
+        <p:spPr>
+          <a:xfrm>
+            <a:off x="4528600" y="300000"/>
+            <a:ext cx="5963400" cy="800000"/>
+          </a:xfrm>
+          <a:prstGeom prst="rect">
+            <a:avLst/>
+          </a:prstGeom>
+          <a:noFill/>
+        </p:spPr>
+        <p:txBody>
+          <a:bodyPr wrap="square" lIns="0" rIns="0" tIns="0" bIns="0">
+            <a:spAutoFit/>
+          </a:bodyPr>
+          <a:lstStyle/>
+          <a:p>
+            <a:r>
+              <a:rPr sz="2400" b="1" i="0">
+                <a:solidFill>
+                  <a:srgbClr val="FFFFFF"/>
+                </a:solidFill>
+                <a:latin typeface="Alegreya Sans"/>
+              </a:rPr>
+              <a:t>Consultante Stratégie &amp; Innovation (suite)</a:t>
+            </a:r>
+          </a:p>
+          <a:p>
+            <a:pPr>
+              <a:spcBef>
+                <a:spcPts val="200"/>
+              </a:spcBef>
+            </a:pPr>
+            <a:r>
+              <a:rPr sz="1500" b="0" i="1">
+                <a:solidFill>
+                  <a:srgbClr val="3AEDE5"/>
+                </a:solidFill>
+                <a:latin typeface="Alegreya Sans"/>
+              </a:rPr>
+              <a:t>Stratégie, transformation &amp; intelligence collective — Retail, Luxe, Santé, FMCG</a:t>
+            </a:r>
+          </a:p>
+        </p:txBody>
+      </p:sp>
+      <p:sp>
+        <p:nvSpPr>
+          <p:cNvPr id="7" name="TextBox 6"/>
+          <p:cNvSpPr txBox="1"/>
+          <p:nvPr/>
+        </p:nvSpPr>
+        <p:spPr>
+          <a:xfrm>
+            <a:off x="228600" y="1180000"/>
+            <a:ext cx="3842800" cy="5318000"/>
+          </a:xfrm>
+          <a:prstGeom prst="rect">
+            <a:avLst/>
+          </a:prstGeom>
+          <a:noFill/>
+        </p:spPr>
+        <p:txBody>
+          <a:bodyPr wrap="square" lIns="0" rIns="0" tIns="0" bIns="0">
+            <a:spAutoFit/>
+          </a:bodyPr>
+          <a:lstStyle/>
+          <a:p>
+            <a:pPr algn="l">
+              <a:spcAft>
+                <a:spcPts val="300"/>
+              </a:spcAft>
+            </a:pPr>
+            <a:r>
+              <a:rPr sz="1300" b="1" i="0">
+                <a:solidFill>
+                  <a:srgbClr val="3AEDE5"/>
+                </a:solidFill>
+                <a:latin typeface="Alegreya Sans"/>
+              </a:rPr>
+              <a:t>DOMAINES D'EXPERTISE</a:t>
+            </a:r>
+          </a:p>
+          <a:p>
+            <a:pPr algn="l">
+              <a:spcAft>
+                <a:spcPts val="100"/>
+              </a:spcAft>
+            </a:pPr>
+            <a:r>
+              <a:rPr sz="1200" b="1" i="0">
+                <a:solidFill>
+                  <a:srgbClr val="3AEDE5"/>
+                </a:solidFill>
+                <a:latin typeface="Alegreya Sans"/>
+              </a:rPr>
+              <a:t>•  </a:t>
+            </a:r>
+            <a:r>
+              <a:rPr sz="1200" b="0" i="0">
+                <a:solidFill>
+                  <a:srgbClr val="FFFFFF"/>
+                </a:solidFill>
+                <a:latin typeface="Alegreya Sans"/>
+              </a:rPr>
+              <a:t>Stratégie &amp; plans stratégiques à 3 ans</a:t>
+            </a:r>
+          </a:p>
+          <a:p>
+            <a:pPr algn="l">
+              <a:spcAft>
+                <a:spcPts val="100"/>
+              </a:spcAft>
+            </a:pPr>
+            <a:r>
+              <a:rPr sz="1200" b="1" i="0">
+                <a:solidFill>
+                  <a:srgbClr val="3AEDE5"/>
+                </a:solidFill>
+                <a:latin typeface="Alegreya Sans"/>
+              </a:rPr>
+              <a:t>•  </a:t>
+            </a:r>
+            <a:r>
+              <a:rPr sz="1200" b="0" i="0">
+                <a:solidFill>
+                  <a:srgbClr val="FFFFFF"/>
+                </a:solidFill>
+                <a:latin typeface="Alegreya Sans"/>
+              </a:rPr>
+              <a:t>Gestion de projet &amp; PMO</a:t>
+            </a:r>
+          </a:p>
+          <a:p>
+            <a:pPr algn="l">
+              <a:spcAft>
+                <a:spcPts val="100"/>
+              </a:spcAft>
+            </a:pPr>
+            <a:r>
+              <a:rPr sz="1200" b="1" i="0">
+                <a:solidFill>
+                  <a:srgbClr val="3AEDE5"/>
+                </a:solidFill>
+                <a:latin typeface="Alegreya Sans"/>
+              </a:rPr>
+              <a:t>•  </a:t>
+            </a:r>
+            <a:r>
+              <a:rPr sz="1200" b="0" i="0">
+                <a:solidFill>
+                  <a:srgbClr val="FFFFFF"/>
+                </a:solidFill>
+                <a:latin typeface="Alegreya Sans"/>
+              </a:rPr>
+              <a:t>Innovation &amp; facilitation (design thinking, double diamant)</a:t>
+            </a:r>
+          </a:p>
+          <a:p>
+            <a:pPr algn="l">
+              <a:spcAft>
+                <a:spcPts val="100"/>
+              </a:spcAft>
+            </a:pPr>
+            <a:r>
+              <a:rPr sz="1200" b="1" i="0">
+                <a:solidFill>
+                  <a:srgbClr val="3AEDE5"/>
+                </a:solidFill>
+                <a:latin typeface="Alegreya Sans"/>
+              </a:rPr>
+              <a:t>•  </a:t>
+            </a:r>
+            <a:r>
+              <a:rPr sz="1200" b="0" i="0">
+                <a:solidFill>
+                  <a:srgbClr val="FFFFFF"/>
+                </a:solidFill>
+                <a:latin typeface="Alegreya Sans"/>
+              </a:rPr>
+              <a:t>Business développement &amp; partenariats</a:t>
+            </a:r>
+          </a:p>
+          <a:p>
+            <a:pPr algn="l">
+              <a:spcAft>
+                <a:spcPts val="100"/>
+              </a:spcAft>
+            </a:pPr>
+            <a:r>
+              <a:rPr sz="1200" b="1" i="0">
+                <a:solidFill>
+                  <a:srgbClr val="3AEDE5"/>
+                </a:solidFill>
+                <a:latin typeface="Alegreya Sans"/>
+              </a:rPr>
+              <a:t>•  </a:t>
+            </a:r>
+            <a:r>
+              <a:rPr sz="1200" b="0" i="0">
+                <a:solidFill>
+                  <a:srgbClr val="FFFFFF"/>
+                </a:solidFill>
+                <a:latin typeface="Alegreya Sans"/>
+              </a:rPr>
+              <a:t>Études de marché &amp; due diligences</a:t>
+            </a:r>
+          </a:p>
+          <a:p>
+            <a:pPr algn="l">
+              <a:spcAft>
+                <a:spcPts val="100"/>
+              </a:spcAft>
+            </a:pPr>
+            <a:r>
+              <a:rPr sz="1200" b="1" i="0">
+                <a:solidFill>
+                  <a:srgbClr val="3AEDE5"/>
+                </a:solidFill>
+                <a:latin typeface="Alegreya Sans"/>
+              </a:rPr>
+              <a:t>•  </a:t>
+            </a:r>
+            <a:r>
+              <a:rPr sz="1200" b="0" i="0">
+                <a:solidFill>
+                  <a:srgbClr val="FFFFFF"/>
+                </a:solidFill>
+                <a:latin typeface="Alegreya Sans"/>
+              </a:rPr>
+              <a:t>Coaching, créativité &amp; neurodiversité</a:t>
+            </a:r>
+          </a:p>
+          <a:p>
+            <a:pPr algn="l">
+              <a:spcAft>
+                <a:spcPts val="100"/>
+              </a:spcAft>
+            </a:pPr>
+            <a:r>
+              <a:rPr sz="1200" b="1" i="0">
+                <a:solidFill>
+                  <a:srgbClr val="3AEDE5"/>
+                </a:solidFill>
+                <a:latin typeface="Alegreya Sans"/>
+              </a:rPr>
+              <a:t>•  </a:t>
+            </a:r>
+            <a:r>
+              <a:rPr sz="1200" b="0" i="0">
+                <a:solidFill>
+                  <a:srgbClr val="FFFFFF"/>
+                </a:solidFill>
+                <a:latin typeface="Alegreya Sans"/>
+              </a:rPr>
+              <a:t>Marketing digital</a:t>
+            </a:r>
+          </a:p>
+        </p:txBody>
+      </p:sp>
+      <p:sp>
+        <p:nvSpPr>
+          <p:cNvPr id="8" name="TextBox 7"/>
+          <p:cNvSpPr txBox="1"/>
+          <p:nvPr/>
+        </p:nvSpPr>
+        <p:spPr>
+          <a:xfrm>
+            <a:off x="4528600" y="1180000"/>
+            <a:ext cx="7434800" cy="5318000"/>
+          </a:xfrm>
+          <a:prstGeom prst="rect">
+            <a:avLst/>
+          </a:prstGeom>
+          <a:noFill/>
+        </p:spPr>
+        <p:txBody>
+          <a:bodyPr wrap="square" lIns="0" rIns="0" tIns="0" bIns="0">
+            <a:spAutoFit/>
+          </a:bodyPr>
+          <a:lstStyle/>
+          <a:p>
+            <a:pPr algn="l">
+              <a:spcAft>
+                <a:spcPts val="300"/>
+              </a:spcAft>
+            </a:pPr>
+            <a:r>
+              <a:rPr sz="1300" b="1" i="0">
+                <a:solidFill>
+                  <a:srgbClr val="3AEDE5"/>
+                </a:solidFill>
+                <a:latin typeface="Alegreya Sans"/>
+              </a:rPr>
+              <a:t>PRINCIPALES EXPÉRIENCES PROFESSIONNELLES (suite)</a:t>
+            </a:r>
+          </a:p>
+          <a:p>
+            <a:pPr algn="l">
+              <a:spcAft>
+                <a:spcPts val="100"/>
+              </a:spcAft>
+            </a:pPr>
+            <a:r>
+              <a:rPr sz="1200" b="1" i="0">
+                <a:solidFill>
+                  <a:srgbClr val="3AEDE5"/>
+                </a:solidFill>
+                <a:latin typeface="Alegreya Sans"/>
+              </a:rPr>
+              <a:t>▸ </a:t>
+            </a:r>
+            <a:r>
+              <a:rPr sz="1200" b="1" i="0">
+                <a:solidFill>
+                  <a:srgbClr val="FFFFFF"/>
+                </a:solidFill>
+                <a:latin typeface="Alegreya Sans"/>
+              </a:rPr>
+              <a:t>Fermiers du Sud-Ouest — FMCG</a:t>
+            </a:r>
+            <a:r>
+              <a:rPr sz="1200" b="0" i="0">
+                <a:solidFill>
+                  <a:srgbClr val="FFFFFF"/>
+                </a:solidFill>
+                <a:latin typeface="Alegreya Sans"/>
+              </a:rPr>
+              <a:t> — Redéfinition de la stratégie de marques et de distribution</a:t>
+            </a:r>
+            <a:r>
+              <a:rPr sz="1200" b="0" i="1">
+                <a:solidFill>
+                  <a:srgbClr val="3AEDE5"/>
+                </a:solidFill>
+                <a:latin typeface="Alegreya Sans"/>
+              </a:rPr>
+              <a:t>  (5 mois)</a:t>
+            </a:r>
+          </a:p>
+          <a:p>
+            <a:pPr algn="l" lvl="1">
+              <a:spcAft>
+                <a:spcPts val="100"/>
+              </a:spcAft>
+            </a:pPr>
+            <a:r>
+              <a:rPr sz="1200" b="1" i="0">
+                <a:solidFill>
+                  <a:srgbClr val="3AEDE5"/>
+                </a:solidFill>
+                <a:latin typeface="Alegreya Sans"/>
+              </a:rPr>
+              <a:t>•  </a:t>
+            </a:r>
+            <a:r>
+              <a:rPr sz="1200" b="0" i="0">
+                <a:solidFill>
+                  <a:srgbClr val="FFFFFF"/>
+                </a:solidFill>
+                <a:latin typeface="Alegreya Sans"/>
+              </a:rPr>
+              <a:t>Interviews des membres du Comex, analyses de marché et benchmark externe, analyse de la performance marketing, commerciale et financière.</a:t>
+            </a:r>
+          </a:p>
+          <a:p>
+            <a:pPr algn="l" lvl="1">
+              <a:spcAft>
+                <a:spcPts val="100"/>
+              </a:spcAft>
+            </a:pPr>
+            <a:r>
+              <a:rPr sz="1200" b="1" i="0">
+                <a:solidFill>
+                  <a:srgbClr val="3AEDE5"/>
+                </a:solidFill>
+                <a:latin typeface="Alegreya Sans"/>
+              </a:rPr>
+              <a:t>•  </a:t>
+            </a:r>
+            <a:r>
+              <a:rPr sz="1200" b="0" i="0">
+                <a:solidFill>
+                  <a:srgbClr val="FFFFFF"/>
+                </a:solidFill>
+                <a:latin typeface="Alegreya Sans"/>
+              </a:rPr>
+              <a:t>Définition, scoring et modélisation de scénarios d'optimisation de la performance, revue de la gouvernance ; animation des comités de pilotage et management de 2 consultants.</a:t>
+            </a:r>
+          </a:p>
+          <a:p>
+            <a:pPr algn="l">
+              <a:spcAft>
+                <a:spcPts val="100"/>
+              </a:spcAft>
+            </a:pPr>
+            <a:r>
+              <a:rPr sz="1200" b="1" i="0">
+                <a:solidFill>
+                  <a:srgbClr val="3AEDE5"/>
+                </a:solidFill>
+                <a:latin typeface="Alegreya Sans"/>
+              </a:rPr>
+              <a:t>▸ </a:t>
+            </a:r>
+            <a:r>
+              <a:rPr sz="1200" b="1" i="0">
+                <a:solidFill>
+                  <a:srgbClr val="FFFFFF"/>
+                </a:solidFill>
+                <a:latin typeface="Alegreya Sans"/>
+              </a:rPr>
+              <a:t>Groupe Novoferm France — Retail</a:t>
+            </a:r>
+            <a:r>
+              <a:rPr sz="1200" b="0" i="0">
+                <a:solidFill>
+                  <a:srgbClr val="FFFFFF"/>
+                </a:solidFill>
+                <a:latin typeface="Alegreya Sans"/>
+              </a:rPr>
+              <a:t> — Plan stratégique à 3 ans</a:t>
+            </a:r>
+            <a:r>
+              <a:rPr sz="1200" b="0" i="1">
+                <a:solidFill>
+                  <a:srgbClr val="3AEDE5"/>
+                </a:solidFill>
+                <a:latin typeface="Alegreya Sans"/>
+              </a:rPr>
+              <a:t>  (3 mois)</a:t>
+            </a:r>
+          </a:p>
+          <a:p>
+            <a:pPr algn="l" lvl="1">
+              <a:spcAft>
+                <a:spcPts val="100"/>
+              </a:spcAft>
+            </a:pPr>
+            <a:r>
+              <a:rPr sz="1200" b="1" i="0">
+                <a:solidFill>
+                  <a:srgbClr val="3AEDE5"/>
+                </a:solidFill>
+                <a:latin typeface="Alegreya Sans"/>
+              </a:rPr>
+              <a:t>•  </a:t>
+            </a:r>
+            <a:r>
+              <a:rPr sz="1200" b="0" i="0">
+                <a:solidFill>
+                  <a:srgbClr val="FFFFFF"/>
+                </a:solidFill>
+                <a:latin typeface="Alegreya Sans"/>
+              </a:rPr>
+              <a:t>Interviews du Comex, entretiens experts, enquête client, benchmark externe et analyses de marché ; identification d'opportunités de croissance.</a:t>
+            </a:r>
+          </a:p>
+          <a:p>
+            <a:pPr algn="l" lvl="1">
+              <a:spcAft>
+                <a:spcPts val="100"/>
+              </a:spcAft>
+            </a:pPr>
+            <a:r>
+              <a:rPr sz="1200" b="1" i="0">
+                <a:solidFill>
+                  <a:srgbClr val="3AEDE5"/>
+                </a:solidFill>
+                <a:latin typeface="Alegreya Sans"/>
+              </a:rPr>
+              <a:t>•  </a:t>
+            </a:r>
+            <a:r>
+              <a:rPr sz="1200" b="0" i="0">
+                <a:solidFill>
+                  <a:srgbClr val="FFFFFF"/>
+                </a:solidFill>
+                <a:latin typeface="Alegreya Sans"/>
+              </a:rPr>
+              <a:t>Définition de la vision cible et des projets prioritaires, structuration de la roadmap à 3 ans, animation de workshops avec le Comex.</a:t>
+            </a:r>
+          </a:p>
+          <a:p>
+            <a:pPr algn="l">
+              <a:spcAft>
+                <a:spcPts val="100"/>
+              </a:spcAft>
+            </a:pPr>
+            <a:r>
+              <a:rPr sz="1200" b="1" i="0">
+                <a:solidFill>
+                  <a:srgbClr val="3AEDE5"/>
+                </a:solidFill>
+                <a:latin typeface="Alegreya Sans"/>
+              </a:rPr>
+              <a:t>▸ </a:t>
+            </a:r>
+            <a:r>
+              <a:rPr sz="1200" b="1" i="0">
+                <a:solidFill>
+                  <a:srgbClr val="FFFFFF"/>
+                </a:solidFill>
+                <a:latin typeface="Alegreya Sans"/>
+              </a:rPr>
+              <a:t>Sodexo France — Retail</a:t>
+            </a:r>
+            <a:r>
+              <a:rPr sz="1200" b="0" i="0">
+                <a:solidFill>
+                  <a:srgbClr val="FFFFFF"/>
+                </a:solidFill>
+                <a:latin typeface="Alegreya Sans"/>
+              </a:rPr>
+              <a:t> — Projet de réorganisation</a:t>
+            </a:r>
+            <a:r>
+              <a:rPr sz="1200" b="0" i="1">
+                <a:solidFill>
+                  <a:srgbClr val="3AEDE5"/>
+                </a:solidFill>
+                <a:latin typeface="Alegreya Sans"/>
+              </a:rPr>
+              <a:t>  (2 mois)</a:t>
+            </a:r>
+          </a:p>
+          <a:p>
+            <a:pPr algn="l" lvl="1">
+              <a:spcAft>
+                <a:spcPts val="100"/>
+              </a:spcAft>
+            </a:pPr>
+            <a:r>
+              <a:rPr sz="1200" b="1" i="0">
+                <a:solidFill>
+                  <a:srgbClr val="3AEDE5"/>
+                </a:solidFill>
+                <a:latin typeface="Alegreya Sans"/>
+              </a:rPr>
+              <a:t>•  </a:t>
+            </a:r>
+            <a:r>
+              <a:rPr sz="1200" b="0" i="0">
+                <a:solidFill>
+                  <a:srgbClr val="FFFFFF"/>
+                </a:solidFill>
+                <a:latin typeface="Alegreya Sans"/>
+              </a:rPr>
+              <a:t>Interviews des membres du Comex, analyses de marché par segment client (besoins clients, roads to market, go to market) et revue de la stratégie de portefeuille de marques.</a:t>
+            </a:r>
+          </a:p>
+          <a:p>
+            <a:pPr algn="l" lvl="1">
+              <a:spcAft>
+                <a:spcPts val="100"/>
+              </a:spcAft>
+            </a:pPr>
+            <a:r>
+              <a:rPr sz="1200" b="1" i="0">
+                <a:solidFill>
+                  <a:srgbClr val="3AEDE5"/>
+                </a:solidFill>
+                <a:latin typeface="Alegreya Sans"/>
+              </a:rPr>
+              <a:t>•  </a:t>
+            </a:r>
+            <a:r>
+              <a:rPr sz="1200" b="0" i="0">
+                <a:solidFill>
+                  <a:srgbClr val="FFFFFF"/>
+                </a:solidFill>
+                <a:latin typeface="Alegreya Sans"/>
+              </a:rPr>
+              <a:t>Participation à la définition des priorités stratégiques, de la nouvelle organisation et des feuilles de route associées ; PMO du projet et animation d'ateliers avec le Comex.</a:t>
+            </a:r>
+          </a:p>
+          <a:p>
+            <a:pPr algn="l">
+              <a:spcAft>
+                <a:spcPts val="100"/>
+              </a:spcAft>
+            </a:pPr>
+            <a:r>
+              <a:rPr sz="1200" b="1" i="0">
+                <a:solidFill>
+                  <a:srgbClr val="3AEDE5"/>
+                </a:solidFill>
+                <a:latin typeface="Alegreya Sans"/>
+              </a:rPr>
+              <a:t>▸ </a:t>
+            </a:r>
+            <a:r>
+              <a:rPr sz="1200" b="1" i="0">
+                <a:solidFill>
+                  <a:srgbClr val="FFFFFF"/>
+                </a:solidFill>
+                <a:latin typeface="Alegreya Sans"/>
+              </a:rPr>
+              <a:t>Carrefour France — Retail</a:t>
+            </a:r>
+            <a:r>
+              <a:rPr sz="1200" b="0" i="0">
+                <a:solidFill>
+                  <a:srgbClr val="FFFFFF"/>
+                </a:solidFill>
+                <a:latin typeface="Alegreya Sans"/>
+              </a:rPr>
+              <a:t> — Préparation du plan stratégique</a:t>
+            </a:r>
+            <a:r>
+              <a:rPr sz="1200" b="0" i="1">
+                <a:solidFill>
+                  <a:srgbClr val="3AEDE5"/>
+                </a:solidFill>
+                <a:latin typeface="Alegreya Sans"/>
+              </a:rPr>
+              <a:t>  (1 mois)</a:t>
+            </a:r>
+          </a:p>
+          <a:p>
+            <a:pPr algn="l" lvl="1">
+              <a:spcAft>
+                <a:spcPts val="100"/>
+              </a:spcAft>
+            </a:pPr>
+            <a:r>
+              <a:rPr sz="1200" b="1" i="0">
+                <a:solidFill>
+                  <a:srgbClr val="3AEDE5"/>
+                </a:solidFill>
+                <a:latin typeface="Alegreya Sans"/>
+              </a:rPr>
+              <a:t>•  </a:t>
+            </a:r>
+            <a:r>
+              <a:rPr sz="1200" b="0" i="0">
+                <a:solidFill>
+                  <a:srgbClr val="FFFFFF"/>
+                </a:solidFill>
+                <a:latin typeface="Alegreya Sans"/>
+              </a:rPr>
+              <a:t>Analyses de marché et des tendances de consommation, revue de la performance de Carrefour et de ses principaux concurrents.</a:t>
+            </a:r>
+          </a:p>
+          <a:p>
+            <a:pPr algn="l" lvl="1">
+              <a:spcAft>
+                <a:spcPts val="100"/>
+              </a:spcAft>
+            </a:pPr>
+            <a:r>
+              <a:rPr sz="1200" b="1" i="0">
+                <a:solidFill>
+                  <a:srgbClr val="3AEDE5"/>
+                </a:solidFill>
+                <a:latin typeface="Alegreya Sans"/>
+              </a:rPr>
+              <a:t>•  </a:t>
+            </a:r>
+            <a:r>
+              <a:rPr sz="1200" b="0" i="0">
+                <a:solidFill>
+                  <a:srgbClr val="FFFFFF"/>
+                </a:solidFill>
+                <a:latin typeface="Alegreya Sans"/>
+              </a:rPr>
+              <a:t>Définition d'une stratégie à 3 ans : storytelling, compilation de documents internes, interviews des directeurs de BU.</a:t>
+            </a:r>
+          </a:p>
+        </p:txBody>
+      </p:sp>
+      <p:sp>
+        <p:nvSpPr>
+          <p:cNvPr id="9" name="Rectangle 8"/>
+          <p:cNvSpPr/>
+          <p:nvPr/>
+        </p:nvSpPr>
+        <p:spPr>
+          <a:xfrm>
+            <a:off x="0" y="6578000"/>
+            <a:ext cx="12192000" cy="280000"/>
+          </a:xfrm>
+          <a:prstGeom prst="rect">
+            <a:avLst/>
+          </a:prstGeom>
+          <a:solidFill>
+            <a:srgbClr val="061A5E"/>
+          </a:solidFill>
+          <a:ln>
+            <a:noFill/>
+          </a:ln>
+          <a:effectLst/>
+        </p:spPr>
+        <p:style>
+          <a:lnRef idx="1">
+            <a:schemeClr val="accent1"/>
+          </a:lnRef>
+          <a:fillRef idx="3">
+            <a:schemeClr val="accent1"/>
+          </a:fillRef>
+          <a:effectRef idx="2">
+            <a:schemeClr val="accent1"/>
+          </a:effectRef>
+          <a:fontRef idx="minor">
+            <a:schemeClr val="lt1"/>
+          </a:fontRef>
+        </p:style>
+        <p:txBody>
+          <a:bodyPr rtlCol="0" anchor="ctr"/>
+          <a:lstStyle/>
+          <a:p>
+            <a:pPr algn="ctr"/>
+          </a:p>
+        </p:txBody>
+      </p:sp>
+      <p:sp>
+        <p:nvSpPr>
+          <p:cNvPr id="10" name="TextBox 9"/>
+          <p:cNvSpPr txBox="1"/>
+          <p:nvPr/>
+        </p:nvSpPr>
+        <p:spPr>
+          <a:xfrm>
+            <a:off x="228600" y="6578000"/>
+            <a:ext cx="11734800" cy="280000"/>
+          </a:xfrm>
+          <a:prstGeom prst="rect">
+            <a:avLst/>
+          </a:prstGeom>
+          <a:noFill/>
+        </p:spPr>
+        <p:txBody>
+          <a:bodyPr wrap="square" lIns="0" rIns="0" tIns="0" bIns="0">
+            <a:spAutoFit/>
+          </a:bodyPr>
+          <a:lstStyle/>
+          <a:p>
+            <a:pPr algn="ctr"/>
+            <a:r>
+              <a:rPr sz="1000" b="0" i="1">
+                <a:solidFill>
+                  <a:srgbClr val="CCD6E8"/>
+                </a:solidFill>
+                <a:latin typeface="Alegreya Sans"/>
+              </a:rPr>
+              <a:t>Les informations de ce document sont strictement confidentielles — Ce document ne peut être partagé qu'avec l'accord de son propriétaire</a:t>
+            </a:r>
+          </a:p>
+        </p:txBody>
+      </p:sp>
+    </p:spTree>
+  </p:cSld>
+  <p:clrMapOvr>
+    <a:masterClrMapping/>
+  </p:clrMapOvr>
+</p:sld>
+</file>
+
+<file path=ppt/slides/slide4.xml><?xml version="1.0" encoding="utf-8"?>
+<p:sld xmlns:a="http://schemas.openxmlformats.org/drawingml/2006/main" xmlns:p="http://schemas.openxmlformats.org/presentationml/2006/main" xmlns:r="http://schemas.openxmlformats.org/officeDocument/2006/relationships">
+  <p:cSld>
+    <p:spTree>
+      <p:nvGrpSpPr>
+        <p:cNvPr id="1" name=""/>
+        <p:cNvGrpSpPr/>
+        <p:nvPr/>
+      </p:nvGrpSpPr>
+      <p:grpSpPr/>
+      <p:sp>
+        <p:nvSpPr>
+          <p:cNvPr id="2" name="Rectangle 1"/>
+          <p:cNvSpPr/>
+          <p:nvPr/>
+        </p:nvSpPr>
+        <p:spPr>
+          <a:xfrm>
+            <a:off x="0" y="0"/>
+            <a:ext cx="12192000" cy="6858000"/>
+          </a:xfrm>
+          <a:prstGeom prst="rect">
+            <a:avLst/>
+          </a:prstGeom>
+          <a:solidFill>
+            <a:srgbClr val="061A5E"/>
+          </a:solidFill>
+          <a:ln>
+            <a:noFill/>
+          </a:ln>
+          <a:effectLst/>
+        </p:spPr>
+        <p:style>
+          <a:lnRef idx="1">
+            <a:schemeClr val="accent1"/>
+          </a:lnRef>
+          <a:fillRef idx="3">
+            <a:schemeClr val="accent1"/>
+          </a:fillRef>
+          <a:effectRef idx="2">
+            <a:schemeClr val="accent1"/>
+          </a:effectRef>
+          <a:fontRef idx="minor">
+            <a:schemeClr val="lt1"/>
+          </a:fontRef>
+        </p:style>
+        <p:txBody>
+          <a:bodyPr rtlCol="0" anchor="ctr"/>
+          <a:lstStyle/>
+          <a:p>
+            <a:pPr algn="ctr"/>
+          </a:p>
+        </p:txBody>
+      </p:sp>
+      <p:sp>
+        <p:nvSpPr>
+          <p:cNvPr id="3" name="Rectangle 2"/>
+          <p:cNvSpPr/>
+          <p:nvPr/>
+        </p:nvSpPr>
+        <p:spPr>
+          <a:xfrm>
+            <a:off x="4300000" y="0"/>
+            <a:ext cx="15000" cy="6858000"/>
+          </a:xfrm>
+          <a:prstGeom prst="rect">
+            <a:avLst/>
+          </a:prstGeom>
+          <a:solidFill>
+            <a:srgbClr val="3AEDE5"/>
+          </a:solidFill>
+          <a:ln>
+            <a:noFill/>
+          </a:ln>
+          <a:effectLst/>
+        </p:spPr>
+        <p:style>
+          <a:lnRef idx="1">
+            <a:schemeClr val="accent1"/>
+          </a:lnRef>
+          <a:fillRef idx="3">
+            <a:schemeClr val="accent1"/>
+          </a:fillRef>
+          <a:effectRef idx="2">
+            <a:schemeClr val="accent1"/>
+          </a:effectRef>
+          <a:fontRef idx="minor">
+            <a:schemeClr val="lt1"/>
+          </a:fontRef>
+        </p:style>
+        <p:txBody>
+          <a:bodyPr rtlCol="0" anchor="ctr"/>
+          <a:lstStyle/>
+          <a:p>
+            <a:pPr algn="ctr"/>
+          </a:p>
+        </p:txBody>
+      </p:sp>
+      <p:pic>
+        <p:nvPicPr>
+          <p:cNvPr id="4" name="Picture 3" descr="inside_circle_logo.png"/>
+          <p:cNvPicPr>
+            <a:picLocks noChangeAspect="1"/>
+          </p:cNvPicPr>
+          <p:nvPr/>
+        </p:nvPicPr>
+        <p:blipFill>
+          <a:blip r:embed="rId2"/>
+          <a:stretch>
+            <a:fillRect/>
+          </a:stretch>
+        </p:blipFill>
+        <p:spPr>
+          <a:xfrm>
+            <a:off x="10660000" y="130000"/>
+            <a:ext cx="1302000" cy="420000"/>
+          </a:xfrm>
+          <a:prstGeom prst="rect">
+            <a:avLst/>
+          </a:prstGeom>
+        </p:spPr>
+      </p:pic>
+      <p:sp>
+        <p:nvSpPr>
+          <p:cNvPr id="5" name="TextBox 4"/>
+          <p:cNvSpPr txBox="1"/>
+          <p:nvPr/>
+        </p:nvSpPr>
+        <p:spPr>
+          <a:xfrm>
+            <a:off x="228600" y="240000"/>
+            <a:ext cx="3842800" cy="1300000"/>
+          </a:xfrm>
+          <a:prstGeom prst="rect">
+            <a:avLst/>
+          </a:prstGeom>
+          <a:noFill/>
+        </p:spPr>
+        <p:txBody>
+          <a:bodyPr wrap="square" lIns="0" rIns="0" tIns="0" bIns="0">
+            <a:spAutoFit/>
+          </a:bodyPr>
+          <a:lstStyle/>
+          <a:p>
+            <a:pPr algn="l"/>
+            <a:r>
+              <a:rPr sz="2800" b="0" i="0">
+                <a:solidFill>
+                  <a:srgbClr val="3AEDE5"/>
+                </a:solidFill>
+                <a:latin typeface="Alegreya Sans"/>
+              </a:rPr>
+              <a:t>Livia</a:t>
+            </a:r>
+          </a:p>
+          <a:p>
+            <a:pPr>
+              <a:spcBef>
+                <a:spcPts val="0"/>
+              </a:spcBef>
+            </a:pPr>
+            <a:r>
+              <a:rPr sz="3200" b="1" i="0">
+                <a:solidFill>
+                  <a:srgbClr val="3AEDE5"/>
+                </a:solidFill>
+                <a:latin typeface="Alegreya Sans"/>
+              </a:rPr>
+              <a:t>BONHOURE</a:t>
+            </a:r>
+          </a:p>
+        </p:txBody>
+      </p:sp>
+      <p:sp>
+        <p:nvSpPr>
+          <p:cNvPr id="6" name="TextBox 5"/>
+          <p:cNvSpPr txBox="1"/>
+          <p:nvPr/>
+        </p:nvSpPr>
+        <p:spPr>
+          <a:xfrm>
+            <a:off x="4528600" y="300000"/>
+            <a:ext cx="5963400" cy="800000"/>
+          </a:xfrm>
+          <a:prstGeom prst="rect">
+            <a:avLst/>
+          </a:prstGeom>
+          <a:noFill/>
+        </p:spPr>
+        <p:txBody>
+          <a:bodyPr wrap="square" lIns="0" rIns="0" tIns="0" bIns="0">
+            <a:spAutoFit/>
+          </a:bodyPr>
+          <a:lstStyle/>
+          <a:p>
+            <a:r>
+              <a:rPr sz="2400" b="1" i="0">
+                <a:solidFill>
+                  <a:srgbClr val="FFFFFF"/>
+                </a:solidFill>
+                <a:latin typeface="Alegreya Sans"/>
+              </a:rPr>
+              <a:t>Consultante Stratégie &amp; Innovation (suite)</a:t>
+            </a:r>
+          </a:p>
+          <a:p>
+            <a:pPr>
+              <a:spcBef>
+                <a:spcPts val="200"/>
+              </a:spcBef>
+            </a:pPr>
+            <a:r>
+              <a:rPr sz="1500" b="0" i="1">
+                <a:solidFill>
+                  <a:srgbClr val="3AEDE5"/>
+                </a:solidFill>
+                <a:latin typeface="Alegreya Sans"/>
+              </a:rPr>
+              <a:t>Stratégie, transformation &amp; intelligence collective — Retail, Luxe, Santé, FMCG</a:t>
+            </a:r>
+          </a:p>
+        </p:txBody>
+      </p:sp>
+      <p:sp>
+        <p:nvSpPr>
+          <p:cNvPr id="7" name="TextBox 6"/>
+          <p:cNvSpPr txBox="1"/>
+          <p:nvPr/>
+        </p:nvSpPr>
+        <p:spPr>
+          <a:xfrm>
+            <a:off x="228600" y="1180000"/>
+            <a:ext cx="3842800" cy="5318000"/>
+          </a:xfrm>
+          <a:prstGeom prst="rect">
+            <a:avLst/>
+          </a:prstGeom>
+          <a:noFill/>
+        </p:spPr>
+        <p:txBody>
+          <a:bodyPr wrap="square" lIns="0" rIns="0" tIns="0" bIns="0">
+            <a:spAutoFit/>
+          </a:bodyPr>
+          <a:lstStyle/>
+          <a:p>
+            <a:pPr algn="l">
+              <a:spcAft>
+                <a:spcPts val="300"/>
+              </a:spcAft>
+            </a:pPr>
+            <a:r>
+              <a:rPr sz="1300" b="1" i="0">
+                <a:solidFill>
+                  <a:srgbClr val="3AEDE5"/>
+                </a:solidFill>
+                <a:latin typeface="Alegreya Sans"/>
+              </a:rPr>
+              <a:t>DOMAINES D'EXPERTISE</a:t>
+            </a:r>
+          </a:p>
+          <a:p>
+            <a:pPr algn="l">
+              <a:spcAft>
+                <a:spcPts val="100"/>
+              </a:spcAft>
+            </a:pPr>
+            <a:r>
+              <a:rPr sz="1200" b="1" i="0">
+                <a:solidFill>
+                  <a:srgbClr val="3AEDE5"/>
+                </a:solidFill>
+                <a:latin typeface="Alegreya Sans"/>
+              </a:rPr>
+              <a:t>•  </a:t>
+            </a:r>
+            <a:r>
+              <a:rPr sz="1200" b="0" i="0">
+                <a:solidFill>
+                  <a:srgbClr val="FFFFFF"/>
+                </a:solidFill>
+                <a:latin typeface="Alegreya Sans"/>
+              </a:rPr>
+              <a:t>Stratégie &amp; plans stratégiques à 3 ans</a:t>
+            </a:r>
+          </a:p>
+          <a:p>
+            <a:pPr algn="l">
+              <a:spcAft>
+                <a:spcPts val="100"/>
+              </a:spcAft>
+            </a:pPr>
+            <a:r>
+              <a:rPr sz="1200" b="1" i="0">
+                <a:solidFill>
+                  <a:srgbClr val="3AEDE5"/>
+                </a:solidFill>
+                <a:latin typeface="Alegreya Sans"/>
+              </a:rPr>
+              <a:t>•  </a:t>
+            </a:r>
+            <a:r>
+              <a:rPr sz="1200" b="0" i="0">
+                <a:solidFill>
+                  <a:srgbClr val="FFFFFF"/>
+                </a:solidFill>
+                <a:latin typeface="Alegreya Sans"/>
+              </a:rPr>
+              <a:t>Gestion de projet &amp; PMO</a:t>
+            </a:r>
+          </a:p>
+          <a:p>
+            <a:pPr algn="l">
+              <a:spcAft>
+                <a:spcPts val="100"/>
+              </a:spcAft>
+            </a:pPr>
+            <a:r>
+              <a:rPr sz="1200" b="1" i="0">
+                <a:solidFill>
+                  <a:srgbClr val="3AEDE5"/>
+                </a:solidFill>
+                <a:latin typeface="Alegreya Sans"/>
+              </a:rPr>
+              <a:t>•  </a:t>
+            </a:r>
+            <a:r>
+              <a:rPr sz="1200" b="0" i="0">
+                <a:solidFill>
+                  <a:srgbClr val="FFFFFF"/>
+                </a:solidFill>
+                <a:latin typeface="Alegreya Sans"/>
+              </a:rPr>
+              <a:t>Innovation &amp; facilitation (design thinking, double diamant)</a:t>
+            </a:r>
+          </a:p>
+          <a:p>
+            <a:pPr algn="l">
+              <a:spcAft>
+                <a:spcPts val="100"/>
+              </a:spcAft>
+            </a:pPr>
+            <a:r>
+              <a:rPr sz="1200" b="1" i="0">
+                <a:solidFill>
+                  <a:srgbClr val="3AEDE5"/>
+                </a:solidFill>
+                <a:latin typeface="Alegreya Sans"/>
+              </a:rPr>
+              <a:t>•  </a:t>
+            </a:r>
+            <a:r>
+              <a:rPr sz="1200" b="0" i="0">
+                <a:solidFill>
+                  <a:srgbClr val="FFFFFF"/>
+                </a:solidFill>
+                <a:latin typeface="Alegreya Sans"/>
+              </a:rPr>
+              <a:t>Business développement &amp; partenariats</a:t>
+            </a:r>
+          </a:p>
+          <a:p>
+            <a:pPr algn="l">
+              <a:spcAft>
+                <a:spcPts val="100"/>
+              </a:spcAft>
+            </a:pPr>
+            <a:r>
+              <a:rPr sz="1200" b="1" i="0">
+                <a:solidFill>
+                  <a:srgbClr val="3AEDE5"/>
+                </a:solidFill>
+                <a:latin typeface="Alegreya Sans"/>
+              </a:rPr>
+              <a:t>•  </a:t>
+            </a:r>
+            <a:r>
+              <a:rPr sz="1200" b="0" i="0">
+                <a:solidFill>
+                  <a:srgbClr val="FFFFFF"/>
+                </a:solidFill>
+                <a:latin typeface="Alegreya Sans"/>
+              </a:rPr>
+              <a:t>Études de marché &amp; due diligences</a:t>
+            </a:r>
+          </a:p>
+          <a:p>
+            <a:pPr algn="l">
+              <a:spcAft>
+                <a:spcPts val="100"/>
+              </a:spcAft>
+            </a:pPr>
+            <a:r>
+              <a:rPr sz="1200" b="1" i="0">
+                <a:solidFill>
+                  <a:srgbClr val="3AEDE5"/>
+                </a:solidFill>
+                <a:latin typeface="Alegreya Sans"/>
+              </a:rPr>
+              <a:t>•  </a:t>
+            </a:r>
+            <a:r>
+              <a:rPr sz="1200" b="0" i="0">
+                <a:solidFill>
+                  <a:srgbClr val="FFFFFF"/>
+                </a:solidFill>
+                <a:latin typeface="Alegreya Sans"/>
+              </a:rPr>
+              <a:t>Coaching, créativité &amp; neurodiversité</a:t>
+            </a:r>
+          </a:p>
+          <a:p>
+            <a:pPr algn="l">
+              <a:spcAft>
+                <a:spcPts val="100"/>
+              </a:spcAft>
+            </a:pPr>
+            <a:r>
+              <a:rPr sz="1200" b="1" i="0">
+                <a:solidFill>
+                  <a:srgbClr val="3AEDE5"/>
+                </a:solidFill>
+                <a:latin typeface="Alegreya Sans"/>
+              </a:rPr>
+              <a:t>•  </a:t>
+            </a:r>
+            <a:r>
+              <a:rPr sz="1200" b="0" i="0">
+                <a:solidFill>
+                  <a:srgbClr val="FFFFFF"/>
+                </a:solidFill>
+                <a:latin typeface="Alegreya Sans"/>
+              </a:rPr>
+              <a:t>Marketing digital</a:t>
+            </a:r>
+          </a:p>
+        </p:txBody>
+      </p:sp>
+      <p:sp>
+        <p:nvSpPr>
+          <p:cNvPr id="8" name="TextBox 7"/>
+          <p:cNvSpPr txBox="1"/>
+          <p:nvPr/>
+        </p:nvSpPr>
+        <p:spPr>
+          <a:xfrm>
+            <a:off x="4528600" y="1180000"/>
+            <a:ext cx="7434800" cy="5318000"/>
+          </a:xfrm>
+          <a:prstGeom prst="rect">
+            <a:avLst/>
+          </a:prstGeom>
+          <a:noFill/>
+        </p:spPr>
+        <p:txBody>
+          <a:bodyPr wrap="square" lIns="0" rIns="0" tIns="0" bIns="0">
+            <a:spAutoFit/>
+          </a:bodyPr>
+          <a:lstStyle/>
+          <a:p>
+            <a:pPr algn="l">
+              <a:spcAft>
+                <a:spcPts val="300"/>
+              </a:spcAft>
+            </a:pPr>
+            <a:r>
+              <a:rPr sz="1300" b="1" i="0">
+                <a:solidFill>
+                  <a:srgbClr val="3AEDE5"/>
+                </a:solidFill>
+                <a:latin typeface="Alegreya Sans"/>
+              </a:rPr>
+              <a:t>PRINCIPALES EXPÉRIENCES PROFESSIONNELLES (suite)</a:t>
+            </a:r>
+          </a:p>
+          <a:p>
+            <a:pPr algn="l">
+              <a:spcAft>
+                <a:spcPts val="100"/>
+              </a:spcAft>
+            </a:pPr>
+            <a:r>
+              <a:rPr sz="1200" b="1" i="0">
+                <a:solidFill>
+                  <a:srgbClr val="3AEDE5"/>
+                </a:solidFill>
+                <a:latin typeface="Alegreya Sans"/>
+              </a:rPr>
+              <a:t>▸ </a:t>
+            </a:r>
+            <a:r>
+              <a:rPr sz="1200" b="1" i="0">
+                <a:solidFill>
+                  <a:srgbClr val="FFFFFF"/>
+                </a:solidFill>
+                <a:latin typeface="Alegreya Sans"/>
+              </a:rPr>
+              <a:t>Renovation Man — Proptech</a:t>
+            </a:r>
+            <a:r>
+              <a:rPr sz="1200" b="0" i="0">
+                <a:solidFill>
+                  <a:srgbClr val="FFFFFF"/>
+                </a:solidFill>
+                <a:latin typeface="Alegreya Sans"/>
+              </a:rPr>
+              <a:t> — Head of Strategic Partnerships</a:t>
+            </a:r>
+            <a:r>
+              <a:rPr sz="1200" b="0" i="1">
+                <a:solidFill>
+                  <a:srgbClr val="3AEDE5"/>
+                </a:solidFill>
+                <a:latin typeface="Alegreya Sans"/>
+              </a:rPr>
+              <a:t>  (2019 — 2022 · 2,5 ans)</a:t>
+            </a:r>
+          </a:p>
+          <a:p>
+            <a:pPr algn="l" lvl="1">
+              <a:spcAft>
+                <a:spcPts val="100"/>
+              </a:spcAft>
+            </a:pPr>
+            <a:r>
+              <a:rPr sz="1200" b="1" i="0">
+                <a:solidFill>
+                  <a:srgbClr val="3AEDE5"/>
+                </a:solidFill>
+                <a:latin typeface="Alegreya Sans"/>
+              </a:rPr>
+              <a:t>•  </a:t>
+            </a:r>
+            <a:r>
+              <a:rPr sz="1200" b="0" i="0">
+                <a:solidFill>
+                  <a:srgbClr val="FFFFFF"/>
+                </a:solidFill>
+                <a:latin typeface="Alegreya Sans"/>
+              </a:rPr>
+              <a:t>Structuration du pôle partenariat : définition du rôle et du périmètre, process de traitement et de suivi des demandes clients partenaires, outils, reporting auprès du CEO.</a:t>
+            </a:r>
+          </a:p>
+          <a:p>
+            <a:pPr algn="l" lvl="1">
+              <a:spcAft>
+                <a:spcPts val="100"/>
+              </a:spcAft>
+            </a:pPr>
+            <a:r>
+              <a:rPr sz="1200" b="1" i="0">
+                <a:solidFill>
+                  <a:srgbClr val="3AEDE5"/>
+                </a:solidFill>
+                <a:latin typeface="Alegreya Sans"/>
+              </a:rPr>
+              <a:t>•  </a:t>
+            </a:r>
+            <a:r>
+              <a:rPr sz="1200" b="0" i="0">
+                <a:solidFill>
+                  <a:srgbClr val="FFFFFF"/>
+                </a:solidFill>
+                <a:latin typeface="Alegreya Sans"/>
+              </a:rPr>
+              <a:t>Stratégie de développement des partenariats : ciblage, approche, négociation, animation et suivi — nombre de partenaires ×6 et nombre de demandes clients ×10.</a:t>
+            </a:r>
+          </a:p>
+          <a:p>
+            <a:pPr algn="l" lvl="1">
+              <a:spcAft>
+                <a:spcPts val="100"/>
+              </a:spcAft>
+            </a:pPr>
+            <a:r>
+              <a:rPr sz="1200" b="1" i="0">
+                <a:solidFill>
+                  <a:srgbClr val="3AEDE5"/>
+                </a:solidFill>
+                <a:latin typeface="Alegreya Sans"/>
+              </a:rPr>
+              <a:t>•  </a:t>
+            </a:r>
+            <a:r>
+              <a:rPr sz="1200" b="0" i="0">
+                <a:solidFill>
+                  <a:srgbClr val="FFFFFF"/>
+                </a:solidFill>
+                <a:latin typeface="Alegreya Sans"/>
+              </a:rPr>
+              <a:t>Parcours de prescription pour les conseillers LCL : besoins en agence, parcours client adapté et pilotage du déploiement — demandes issues de la prescription ×3 sur 2020-21.</a:t>
+            </a:r>
+          </a:p>
+          <a:p>
+            <a:pPr algn="l" lvl="1">
+              <a:spcAft>
+                <a:spcPts val="100"/>
+              </a:spcAft>
+            </a:pPr>
+            <a:r>
+              <a:rPr sz="1200" b="1" i="0">
+                <a:solidFill>
+                  <a:srgbClr val="3AEDE5"/>
+                </a:solidFill>
+                <a:latin typeface="Alegreya Sans"/>
+              </a:rPr>
+              <a:t>•  </a:t>
+            </a:r>
+            <a:r>
+              <a:rPr sz="1200" b="0" i="0">
+                <a:solidFill>
+                  <a:srgbClr val="FFFFFF"/>
+                </a:solidFill>
+                <a:latin typeface="Alegreya Sans"/>
+              </a:rPr>
+              <a:t>Offres partenaires : Mon Chasseur Immo (travaux × investissement locatif, lancement en 6 régions, 10 % des demandes clients du partenaire en 2021) et Rhinov (parcours client commun, POC lancé en janvier 2022).</a:t>
+            </a:r>
+          </a:p>
+          <a:p>
+            <a:pPr algn="l">
+              <a:spcAft>
+                <a:spcPts val="100"/>
+              </a:spcAft>
+            </a:pPr>
+            <a:r>
+              <a:rPr sz="1200" b="1" i="0">
+                <a:solidFill>
+                  <a:srgbClr val="3AEDE5"/>
+                </a:solidFill>
+                <a:latin typeface="Alegreya Sans"/>
+              </a:rPr>
+              <a:t>▸ </a:t>
+            </a:r>
+            <a:r>
+              <a:rPr sz="1200" b="1" i="0">
+                <a:solidFill>
+                  <a:srgbClr val="FFFFFF"/>
+                </a:solidFill>
+                <a:latin typeface="Alegreya Sans"/>
+              </a:rPr>
+              <a:t>Groupe Baobab — Finance</a:t>
+            </a:r>
+            <a:r>
+              <a:rPr sz="1200" b="0" i="0">
+                <a:solidFill>
+                  <a:srgbClr val="FFFFFF"/>
+                </a:solidFill>
+                <a:latin typeface="Alegreya Sans"/>
+              </a:rPr>
+              <a:t> — Préparation d'un séminaire Comex</a:t>
+            </a:r>
+            <a:r>
+              <a:rPr sz="1200" b="0" i="1">
+                <a:solidFill>
+                  <a:srgbClr val="3AEDE5"/>
+                </a:solidFill>
+                <a:latin typeface="Alegreya Sans"/>
+              </a:rPr>
+              <a:t>  (5 jours)</a:t>
+            </a:r>
+          </a:p>
+          <a:p>
+            <a:pPr algn="l" lvl="1">
+              <a:spcAft>
+                <a:spcPts val="100"/>
+              </a:spcAft>
+            </a:pPr>
+            <a:r>
+              <a:rPr sz="1200" b="1" i="0">
+                <a:solidFill>
+                  <a:srgbClr val="3AEDE5"/>
+                </a:solidFill>
+                <a:latin typeface="Alegreya Sans"/>
+              </a:rPr>
+              <a:t>•  </a:t>
+            </a:r>
+            <a:r>
+              <a:rPr sz="1200" b="0" i="0">
+                <a:solidFill>
+                  <a:srgbClr val="FFFFFF"/>
+                </a:solidFill>
+                <a:latin typeface="Alegreya Sans"/>
+              </a:rPr>
+              <a:t>Analyses de marché et benchmark externe, préparation d'ateliers de réflexion sur des sujets stratégiques (portefeuille produit, distribution, saisonnalité).</a:t>
+            </a:r>
+          </a:p>
+          <a:p>
+            <a:pPr algn="l" lvl="1">
+              <a:spcAft>
+                <a:spcPts val="100"/>
+              </a:spcAft>
+            </a:pPr>
+            <a:r>
+              <a:rPr sz="1200" b="1" i="0">
+                <a:solidFill>
+                  <a:srgbClr val="3AEDE5"/>
+                </a:solidFill>
+                <a:latin typeface="Alegreya Sans"/>
+              </a:rPr>
+              <a:t>•  </a:t>
+            </a:r>
+            <a:r>
+              <a:rPr sz="1200" b="0" i="0">
+                <a:solidFill>
+                  <a:srgbClr val="FFFFFF"/>
+                </a:solidFill>
+                <a:latin typeface="Alegreya Sans"/>
+              </a:rPr>
+              <a:t>Revue de la stratégie digitale d'acquisition client.</a:t>
+            </a:r>
+          </a:p>
+          <a:p>
+            <a:pPr algn="l">
+              <a:spcAft>
+                <a:spcPts val="100"/>
+              </a:spcAft>
+            </a:pPr>
+            <a:r>
+              <a:rPr sz="1200" b="1" i="0">
+                <a:solidFill>
+                  <a:srgbClr val="3AEDE5"/>
+                </a:solidFill>
+                <a:latin typeface="Alegreya Sans"/>
+              </a:rPr>
+              <a:t>▸ </a:t>
+            </a:r>
+            <a:r>
+              <a:rPr sz="1200" b="1" i="0">
+                <a:solidFill>
+                  <a:srgbClr val="FFFFFF"/>
+                </a:solidFill>
+                <a:latin typeface="Alegreya Sans"/>
+              </a:rPr>
+              <a:t>Future Agency</a:t>
+            </a:r>
+            <a:r>
+              <a:rPr sz="1200" b="0" i="0">
+                <a:solidFill>
+                  <a:srgbClr val="FFFFFF"/>
+                </a:solidFill>
+                <a:latin typeface="Alegreya Sans"/>
+              </a:rPr>
+              <a:t> — Construction et facilitation d'ateliers d'intelligence collective</a:t>
+            </a:r>
+            <a:r>
+              <a:rPr sz="1200" b="0" i="1">
+                <a:solidFill>
+                  <a:srgbClr val="3AEDE5"/>
+                </a:solidFill>
+                <a:latin typeface="Alegreya Sans"/>
+              </a:rPr>
+              <a:t>  (1 an)</a:t>
+            </a:r>
+          </a:p>
+          <a:p>
+            <a:pPr algn="l" lvl="1">
+              <a:spcAft>
+                <a:spcPts val="100"/>
+              </a:spcAft>
+            </a:pPr>
+            <a:r>
+              <a:rPr sz="1200" b="1" i="0">
+                <a:solidFill>
+                  <a:srgbClr val="3AEDE5"/>
+                </a:solidFill>
+                <a:latin typeface="Alegreya Sans"/>
+              </a:rPr>
+              <a:t>•  </a:t>
+            </a:r>
+            <a:r>
+              <a:rPr sz="1200" b="0" i="0">
+                <a:solidFill>
+                  <a:srgbClr val="FFFFFF"/>
+                </a:solidFill>
+                <a:latin typeface="Alegreya Sans"/>
+              </a:rPr>
+              <a:t>Préparation (objectifs, supports, livrables) et animation d'ateliers pour des start-ups et organismes publics dans l'assurance, le transport, l'immobilier, le luxe et la santé.</a:t>
+            </a:r>
+          </a:p>
+          <a:p>
+            <a:pPr algn="l" lvl="1">
+              <a:spcAft>
+                <a:spcPts val="100"/>
+              </a:spcAft>
+            </a:pPr>
+            <a:r>
+              <a:rPr sz="1200" b="1" i="0">
+                <a:solidFill>
+                  <a:srgbClr val="3AEDE5"/>
+                </a:solidFill>
+                <a:latin typeface="Alegreya Sans"/>
+              </a:rPr>
+              <a:t>•  </a:t>
+            </a:r>
+            <a:r>
+              <a:rPr sz="1200" b="0" i="0">
+                <a:solidFill>
+                  <a:srgbClr val="FFFFFF"/>
+                </a:solidFill>
+                <a:latin typeface="Alegreya Sans"/>
+              </a:rPr>
+              <a:t>Mobilisation de diverses méthodes d'intelligence collective : design thinking, double diamant.</a:t>
+            </a:r>
+          </a:p>
+        </p:txBody>
+      </p:sp>
+      <p:sp>
+        <p:nvSpPr>
+          <p:cNvPr id="9" name="Rectangle 8"/>
+          <p:cNvSpPr/>
+          <p:nvPr/>
+        </p:nvSpPr>
+        <p:spPr>
+          <a:xfrm>
+            <a:off x="0" y="6578000"/>
+            <a:ext cx="12192000" cy="280000"/>
+          </a:xfrm>
+          <a:prstGeom prst="rect">
+            <a:avLst/>
+          </a:prstGeom>
+          <a:solidFill>
+            <a:srgbClr val="061A5E"/>
+          </a:solidFill>
+          <a:ln>
+            <a:noFill/>
+          </a:ln>
+          <a:effectLst/>
+        </p:spPr>
+        <p:style>
+          <a:lnRef idx="1">
+            <a:schemeClr val="accent1"/>
+          </a:lnRef>
+          <a:fillRef idx="3">
+            <a:schemeClr val="accent1"/>
+          </a:fillRef>
+          <a:effectRef idx="2">
+            <a:schemeClr val="accent1"/>
+          </a:effectRef>
+          <a:fontRef idx="minor">
+            <a:schemeClr val="lt1"/>
+          </a:fontRef>
+        </p:style>
+        <p:txBody>
+          <a:bodyPr rtlCol="0" anchor="ctr"/>
+          <a:lstStyle/>
+          <a:p>
+            <a:pPr algn="ctr"/>
+          </a:p>
+        </p:txBody>
+      </p:sp>
+      <p:sp>
+        <p:nvSpPr>
+          <p:cNvPr id="10" name="TextBox 9"/>
+          <p:cNvSpPr txBox="1"/>
+          <p:nvPr/>
+        </p:nvSpPr>
+        <p:spPr>
+          <a:xfrm>
+            <a:off x="228600" y="6578000"/>
+            <a:ext cx="11734800" cy="280000"/>
+          </a:xfrm>
+          <a:prstGeom prst="rect">
+            <a:avLst/>
+          </a:prstGeom>
+          <a:noFill/>
+        </p:spPr>
+        <p:txBody>
+          <a:bodyPr wrap="square" lIns="0" rIns="0" tIns="0" bIns="0">
+            <a:spAutoFit/>
+          </a:bodyPr>
+          <a:lstStyle/>
+          <a:p>
+            <a:pPr algn="ctr"/>
+            <a:r>
+              <a:rPr sz="1000" b="0" i="1">
+                <a:solidFill>
+                  <a:srgbClr val="CCD6E8"/>
+                </a:solidFill>
+                <a:latin typeface="Alegreya Sans"/>
+              </a:rPr>
+              <a:t>Les informations de ce document sont strictement confidentielles — Ce document ne peut être partagé qu'avec l'accord de son propriétaire</a:t>
+            </a:r>
+          </a:p>
+        </p:txBody>
+      </p:sp>
+    </p:spTree>
+  </p:cSld>
+  <p:clrMapOvr>
+    <a:masterClrMapping/>
+  </p:clrMapOvr>
+</p:sld>
+</file>
+
+<file path=ppt/slides/slide5.xml><?xml version="1.0" encoding="utf-8"?>
+<p:sld xmlns:a="http://schemas.openxmlformats.org/drawingml/2006/main" xmlns:p="http://schemas.openxmlformats.org/presentationml/2006/main" xmlns:r="http://schemas.openxmlformats.org/officeDocument/2006/relationships">
+  <p:cSld>
+    <p:spTree>
+      <p:nvGrpSpPr>
+        <p:cNvPr id="1" name=""/>
+        <p:cNvGrpSpPr/>
+        <p:nvPr/>
+      </p:nvGrpSpPr>
+      <p:grpSpPr/>
+      <p:sp>
+        <p:nvSpPr>
+          <p:cNvPr id="2" name="Rectangle 1"/>
+          <p:cNvSpPr/>
+          <p:nvPr/>
+        </p:nvSpPr>
+        <p:spPr>
+          <a:xfrm>
+            <a:off x="0" y="0"/>
+            <a:ext cx="12192000" cy="6858000"/>
+          </a:xfrm>
+          <a:prstGeom prst="rect">
+            <a:avLst/>
+          </a:prstGeom>
+          <a:solidFill>
+            <a:srgbClr val="061A5E"/>
+          </a:solidFill>
+          <a:ln>
+            <a:noFill/>
+          </a:ln>
+          <a:effectLst/>
+        </p:spPr>
+        <p:style>
+          <a:lnRef idx="1">
+            <a:schemeClr val="accent1"/>
+          </a:lnRef>
+          <a:fillRef idx="3">
+            <a:schemeClr val="accent1"/>
+          </a:fillRef>
+          <a:effectRef idx="2">
+            <a:schemeClr val="accent1"/>
+          </a:effectRef>
+          <a:fontRef idx="minor">
+            <a:schemeClr val="lt1"/>
+          </a:fontRef>
+        </p:style>
+        <p:txBody>
+          <a:bodyPr rtlCol="0" anchor="ctr"/>
+          <a:lstStyle/>
+          <a:p>
+            <a:pPr algn="ctr"/>
+          </a:p>
+        </p:txBody>
+      </p:sp>
+      <p:sp>
+        <p:nvSpPr>
+          <p:cNvPr id="3" name="Rectangle 2"/>
+          <p:cNvSpPr/>
+          <p:nvPr/>
+        </p:nvSpPr>
+        <p:spPr>
+          <a:xfrm>
+            <a:off x="4300000" y="0"/>
+            <a:ext cx="15000" cy="6858000"/>
+          </a:xfrm>
+          <a:prstGeom prst="rect">
+            <a:avLst/>
+          </a:prstGeom>
+          <a:solidFill>
+            <a:srgbClr val="3AEDE5"/>
+          </a:solidFill>
+          <a:ln>
+            <a:noFill/>
+          </a:ln>
+          <a:effectLst/>
+        </p:spPr>
+        <p:style>
+          <a:lnRef idx="1">
+            <a:schemeClr val="accent1"/>
+          </a:lnRef>
+          <a:fillRef idx="3">
+            <a:schemeClr val="accent1"/>
+          </a:fillRef>
+          <a:effectRef idx="2">
+            <a:schemeClr val="accent1"/>
+          </a:effectRef>
+          <a:fontRef idx="minor">
+            <a:schemeClr val="lt1"/>
+          </a:fontRef>
+        </p:style>
+        <p:txBody>
+          <a:bodyPr rtlCol="0" anchor="ctr"/>
+          <a:lstStyle/>
+          <a:p>
+            <a:pPr algn="ctr"/>
+          </a:p>
+        </p:txBody>
+      </p:sp>
+      <p:pic>
+        <p:nvPicPr>
+          <p:cNvPr id="4" name="Picture 3" descr="inside_circle_logo.png"/>
+          <p:cNvPicPr>
+            <a:picLocks noChangeAspect="1"/>
+          </p:cNvPicPr>
+          <p:nvPr/>
+        </p:nvPicPr>
+        <p:blipFill>
+          <a:blip r:embed="rId2"/>
+          <a:stretch>
+            <a:fillRect/>
+          </a:stretch>
+        </p:blipFill>
+        <p:spPr>
+          <a:xfrm>
+            <a:off x="10660000" y="130000"/>
+            <a:ext cx="1302000" cy="420000"/>
+          </a:xfrm>
+          <a:prstGeom prst="rect">
+            <a:avLst/>
+          </a:prstGeom>
+        </p:spPr>
+      </p:pic>
+      <p:sp>
+        <p:nvSpPr>
+          <p:cNvPr id="5" name="TextBox 4"/>
+          <p:cNvSpPr txBox="1"/>
+          <p:nvPr/>
+        </p:nvSpPr>
+        <p:spPr>
+          <a:xfrm>
+            <a:off x="228600" y="240000"/>
+            <a:ext cx="3842800" cy="1300000"/>
+          </a:xfrm>
+          <a:prstGeom prst="rect">
+            <a:avLst/>
+          </a:prstGeom>
+          <a:noFill/>
+        </p:spPr>
+        <p:txBody>
+          <a:bodyPr wrap="square" lIns="0" rIns="0" tIns="0" bIns="0">
+            <a:spAutoFit/>
+          </a:bodyPr>
+          <a:lstStyle/>
+          <a:p>
+            <a:pPr algn="l"/>
+            <a:r>
+              <a:rPr sz="2800" b="0" i="0">
+                <a:solidFill>
+                  <a:srgbClr val="3AEDE5"/>
+                </a:solidFill>
+                <a:latin typeface="Alegreya Sans"/>
+              </a:rPr>
+              <a:t>Livia</a:t>
+            </a:r>
+          </a:p>
+          <a:p>
+            <a:pPr>
+              <a:spcBef>
+                <a:spcPts val="0"/>
+              </a:spcBef>
+            </a:pPr>
+            <a:r>
+              <a:rPr sz="3200" b="1" i="0">
+                <a:solidFill>
+                  <a:srgbClr val="3AEDE5"/>
+                </a:solidFill>
+                <a:latin typeface="Alegreya Sans"/>
+              </a:rPr>
+              <a:t>BONHOURE</a:t>
+            </a:r>
+          </a:p>
+        </p:txBody>
+      </p:sp>
+      <p:sp>
+        <p:nvSpPr>
+          <p:cNvPr id="6" name="TextBox 5"/>
+          <p:cNvSpPr txBox="1"/>
+          <p:nvPr/>
+        </p:nvSpPr>
+        <p:spPr>
+          <a:xfrm>
+            <a:off x="4528600" y="300000"/>
+            <a:ext cx="5963400" cy="800000"/>
+          </a:xfrm>
+          <a:prstGeom prst="rect">
+            <a:avLst/>
+          </a:prstGeom>
+          <a:noFill/>
+        </p:spPr>
+        <p:txBody>
+          <a:bodyPr wrap="square" lIns="0" rIns="0" tIns="0" bIns="0">
+            <a:spAutoFit/>
+          </a:bodyPr>
+          <a:lstStyle/>
+          <a:p>
+            <a:r>
+              <a:rPr sz="2400" b="1" i="0">
+                <a:solidFill>
+                  <a:srgbClr val="FFFFFF"/>
+                </a:solidFill>
+                <a:latin typeface="Alegreya Sans"/>
+              </a:rPr>
+              <a:t>Consultante Stratégie &amp; Innovation (suite)</a:t>
+            </a:r>
+          </a:p>
+          <a:p>
+            <a:pPr>
+              <a:spcBef>
+                <a:spcPts val="200"/>
+              </a:spcBef>
+            </a:pPr>
+            <a:r>
+              <a:rPr sz="1500" b="0" i="1">
+                <a:solidFill>
+                  <a:srgbClr val="3AEDE5"/>
+                </a:solidFill>
+                <a:latin typeface="Alegreya Sans"/>
+              </a:rPr>
+              <a:t>Stratégie, transformation &amp; intelligence collective — Retail, Luxe, Santé, FMCG</a:t>
+            </a:r>
+          </a:p>
+        </p:txBody>
+      </p:sp>
+      <p:sp>
+        <p:nvSpPr>
+          <p:cNvPr id="7" name="TextBox 6"/>
+          <p:cNvSpPr txBox="1"/>
+          <p:nvPr/>
+        </p:nvSpPr>
+        <p:spPr>
+          <a:xfrm>
+            <a:off x="228600" y="1180000"/>
+            <a:ext cx="3842800" cy="5318000"/>
+          </a:xfrm>
+          <a:prstGeom prst="rect">
+            <a:avLst/>
+          </a:prstGeom>
+          <a:noFill/>
+        </p:spPr>
+        <p:txBody>
+          <a:bodyPr wrap="square" lIns="0" rIns="0" tIns="0" bIns="0">
+            <a:spAutoFit/>
+          </a:bodyPr>
+          <a:lstStyle/>
+          <a:p>
+            <a:pPr algn="l">
+              <a:spcAft>
+                <a:spcPts val="300"/>
+              </a:spcAft>
+            </a:pPr>
+            <a:r>
+              <a:rPr sz="1300" b="1" i="0">
+                <a:solidFill>
+                  <a:srgbClr val="3AEDE5"/>
+                </a:solidFill>
+                <a:latin typeface="Alegreya Sans"/>
+              </a:rPr>
+              <a:t>DOMAINES D'EXPERTISE</a:t>
+            </a:r>
+          </a:p>
+          <a:p>
+            <a:pPr algn="l">
+              <a:spcAft>
+                <a:spcPts val="100"/>
+              </a:spcAft>
+            </a:pPr>
+            <a:r>
+              <a:rPr sz="1200" b="1" i="0">
+                <a:solidFill>
+                  <a:srgbClr val="3AEDE5"/>
+                </a:solidFill>
+                <a:latin typeface="Alegreya Sans"/>
+              </a:rPr>
+              <a:t>•  </a:t>
+            </a:r>
+            <a:r>
+              <a:rPr sz="1200" b="0" i="0">
+                <a:solidFill>
+                  <a:srgbClr val="FFFFFF"/>
+                </a:solidFill>
+                <a:latin typeface="Alegreya Sans"/>
+              </a:rPr>
+              <a:t>Stratégie &amp; plans stratégiques à 3 ans</a:t>
+            </a:r>
+          </a:p>
+          <a:p>
+            <a:pPr algn="l">
+              <a:spcAft>
+                <a:spcPts val="100"/>
+              </a:spcAft>
+            </a:pPr>
+            <a:r>
+              <a:rPr sz="1200" b="1" i="0">
+                <a:solidFill>
+                  <a:srgbClr val="3AEDE5"/>
+                </a:solidFill>
+                <a:latin typeface="Alegreya Sans"/>
+              </a:rPr>
+              <a:t>•  </a:t>
+            </a:r>
+            <a:r>
+              <a:rPr sz="1200" b="0" i="0">
+                <a:solidFill>
+                  <a:srgbClr val="FFFFFF"/>
+                </a:solidFill>
+                <a:latin typeface="Alegreya Sans"/>
+              </a:rPr>
+              <a:t>Gestion de projet &amp; PMO</a:t>
+            </a:r>
+          </a:p>
+          <a:p>
+            <a:pPr algn="l">
+              <a:spcAft>
+                <a:spcPts val="100"/>
+              </a:spcAft>
+            </a:pPr>
+            <a:r>
+              <a:rPr sz="1200" b="1" i="0">
+                <a:solidFill>
+                  <a:srgbClr val="3AEDE5"/>
+                </a:solidFill>
+                <a:latin typeface="Alegreya Sans"/>
+              </a:rPr>
+              <a:t>•  </a:t>
+            </a:r>
+            <a:r>
+              <a:rPr sz="1200" b="0" i="0">
+                <a:solidFill>
+                  <a:srgbClr val="FFFFFF"/>
+                </a:solidFill>
+                <a:latin typeface="Alegreya Sans"/>
+              </a:rPr>
+              <a:t>Innovation &amp; facilitation (design thinking, double diamant)</a:t>
+            </a:r>
+          </a:p>
+          <a:p>
+            <a:pPr algn="l">
+              <a:spcAft>
+                <a:spcPts val="100"/>
+              </a:spcAft>
+            </a:pPr>
+            <a:r>
+              <a:rPr sz="1200" b="1" i="0">
+                <a:solidFill>
+                  <a:srgbClr val="3AEDE5"/>
+                </a:solidFill>
+                <a:latin typeface="Alegreya Sans"/>
+              </a:rPr>
+              <a:t>•  </a:t>
+            </a:r>
+            <a:r>
+              <a:rPr sz="1200" b="0" i="0">
+                <a:solidFill>
+                  <a:srgbClr val="FFFFFF"/>
+                </a:solidFill>
+                <a:latin typeface="Alegreya Sans"/>
+              </a:rPr>
+              <a:t>Business développement &amp; partenariats</a:t>
+            </a:r>
+          </a:p>
+          <a:p>
+            <a:pPr algn="l">
+              <a:spcAft>
+                <a:spcPts val="100"/>
+              </a:spcAft>
+            </a:pPr>
+            <a:r>
+              <a:rPr sz="1200" b="1" i="0">
+                <a:solidFill>
+                  <a:srgbClr val="3AEDE5"/>
+                </a:solidFill>
+                <a:latin typeface="Alegreya Sans"/>
+              </a:rPr>
+              <a:t>•  </a:t>
+            </a:r>
+            <a:r>
+              <a:rPr sz="1200" b="0" i="0">
+                <a:solidFill>
+                  <a:srgbClr val="FFFFFF"/>
+                </a:solidFill>
+                <a:latin typeface="Alegreya Sans"/>
+              </a:rPr>
+              <a:t>Études de marché &amp; due diligences</a:t>
+            </a:r>
+          </a:p>
+          <a:p>
+            <a:pPr algn="l">
+              <a:spcAft>
+                <a:spcPts val="100"/>
+              </a:spcAft>
+            </a:pPr>
+            <a:r>
+              <a:rPr sz="1200" b="1" i="0">
+                <a:solidFill>
+                  <a:srgbClr val="3AEDE5"/>
+                </a:solidFill>
+                <a:latin typeface="Alegreya Sans"/>
+              </a:rPr>
+              <a:t>•  </a:t>
+            </a:r>
+            <a:r>
+              <a:rPr sz="1200" b="0" i="0">
+                <a:solidFill>
+                  <a:srgbClr val="FFFFFF"/>
+                </a:solidFill>
+                <a:latin typeface="Alegreya Sans"/>
+              </a:rPr>
+              <a:t>Coaching, créativité &amp; neurodiversité</a:t>
+            </a:r>
+          </a:p>
+          <a:p>
+            <a:pPr algn="l">
+              <a:spcAft>
+                <a:spcPts val="100"/>
+              </a:spcAft>
+            </a:pPr>
+            <a:r>
+              <a:rPr sz="1200" b="1" i="0">
+                <a:solidFill>
+                  <a:srgbClr val="3AEDE5"/>
+                </a:solidFill>
+                <a:latin typeface="Alegreya Sans"/>
+              </a:rPr>
+              <a:t>•  </a:t>
+            </a:r>
+            <a:r>
+              <a:rPr sz="1200" b="0" i="0">
+                <a:solidFill>
+                  <a:srgbClr val="FFFFFF"/>
+                </a:solidFill>
+                <a:latin typeface="Alegreya Sans"/>
+              </a:rPr>
+              <a:t>Marketing digital</a:t>
+            </a:r>
+          </a:p>
+        </p:txBody>
+      </p:sp>
+      <p:sp>
+        <p:nvSpPr>
+          <p:cNvPr id="8" name="TextBox 7"/>
+          <p:cNvSpPr txBox="1"/>
+          <p:nvPr/>
+        </p:nvSpPr>
+        <p:spPr>
+          <a:xfrm>
+            <a:off x="4528600" y="1180000"/>
+            <a:ext cx="7434800" cy="5318000"/>
+          </a:xfrm>
+          <a:prstGeom prst="rect">
+            <a:avLst/>
+          </a:prstGeom>
+          <a:noFill/>
+        </p:spPr>
+        <p:txBody>
+          <a:bodyPr wrap="square" lIns="0" rIns="0" tIns="0" bIns="0">
+            <a:spAutoFit/>
+          </a:bodyPr>
+          <a:lstStyle/>
+          <a:p>
+            <a:pPr algn="l">
+              <a:spcAft>
+                <a:spcPts val="300"/>
+              </a:spcAft>
+            </a:pPr>
+            <a:r>
+              <a:rPr sz="1300" b="1" i="0">
+                <a:solidFill>
+                  <a:srgbClr val="3AEDE5"/>
+                </a:solidFill>
+                <a:latin typeface="Alegreya Sans"/>
+              </a:rPr>
+              <a:t>PRINCIPALES EXPÉRIENCES PROFESSIONNELLES (suite)</a:t>
+            </a:r>
+          </a:p>
+          <a:p>
+            <a:pPr algn="l">
+              <a:spcAft>
+                <a:spcPts val="100"/>
+              </a:spcAft>
+            </a:pPr>
+            <a:r>
+              <a:rPr sz="1200" b="1" i="0">
+                <a:solidFill>
+                  <a:srgbClr val="3AEDE5"/>
+                </a:solidFill>
+                <a:latin typeface="Alegreya Sans"/>
+              </a:rPr>
+              <a:t>▸ </a:t>
+            </a:r>
+            <a:r>
+              <a:rPr sz="1200" b="1" i="0">
+                <a:solidFill>
+                  <a:srgbClr val="FFFFFF"/>
+                </a:solidFill>
+                <a:latin typeface="Alegreya Sans"/>
+              </a:rPr>
+              <a:t>EY-Parthenon</a:t>
+            </a:r>
+            <a:r>
+              <a:rPr sz="1200" b="0" i="0">
+                <a:solidFill>
+                  <a:srgbClr val="FFFFFF"/>
+                </a:solidFill>
+                <a:latin typeface="Alegreya Sans"/>
+              </a:rPr>
+              <a:t> — Senior Associate Consultant</a:t>
+            </a:r>
+            <a:r>
+              <a:rPr sz="1200" b="0" i="1">
+                <a:solidFill>
+                  <a:srgbClr val="3AEDE5"/>
+                </a:solidFill>
+                <a:latin typeface="Alegreya Sans"/>
+              </a:rPr>
+              <a:t>  (2018 — 2019)</a:t>
+            </a:r>
+          </a:p>
+          <a:p>
+            <a:pPr algn="l" lvl="1">
+              <a:spcAft>
+                <a:spcPts val="100"/>
+              </a:spcAft>
+            </a:pPr>
+            <a:r>
+              <a:rPr sz="1200" b="1" i="0">
+                <a:solidFill>
+                  <a:srgbClr val="3AEDE5"/>
+                </a:solidFill>
+                <a:latin typeface="Alegreya Sans"/>
+              </a:rPr>
+              <a:t>•  </a:t>
+            </a:r>
+            <a:r>
+              <a:rPr sz="1200" b="0" i="0">
+                <a:solidFill>
+                  <a:srgbClr val="FFFFFF"/>
+                </a:solidFill>
+                <a:latin typeface="Alegreya Sans"/>
+              </a:rPr>
+              <a:t>Création d'un projet interne de culture d'entreprise pour promouvoir la diversité et l'inclusion : outils de diagnostic et d'ouverture du dialogue.</a:t>
+            </a:r>
+          </a:p>
+          <a:p>
+            <a:pPr algn="l" lvl="1">
+              <a:spcAft>
+                <a:spcPts val="100"/>
+              </a:spcAft>
+            </a:pPr>
+            <a:r>
+              <a:rPr sz="1200" b="1" i="0">
+                <a:solidFill>
+                  <a:srgbClr val="3AEDE5"/>
+                </a:solidFill>
+                <a:latin typeface="Alegreya Sans"/>
+              </a:rPr>
+              <a:t>•  </a:t>
+            </a:r>
+            <a:r>
+              <a:rPr sz="1200" b="0" i="0">
+                <a:solidFill>
+                  <a:srgbClr val="FFFFFF"/>
+                </a:solidFill>
+                <a:latin typeface="Alegreya Sans"/>
+              </a:rPr>
+              <a:t>Définition et mise en place d'un comité de traitement des comportements non inclusifs et d'un parcours de formation / coaching.</a:t>
+            </a:r>
+          </a:p>
+          <a:p>
+            <a:pPr algn="l">
+              <a:spcAft>
+                <a:spcPts val="100"/>
+              </a:spcAft>
+            </a:pPr>
+            <a:r>
+              <a:rPr sz="1200" b="1" i="0">
+                <a:solidFill>
+                  <a:srgbClr val="3AEDE5"/>
+                </a:solidFill>
+                <a:latin typeface="Alegreya Sans"/>
+              </a:rPr>
+              <a:t>▸ </a:t>
+            </a:r>
+            <a:r>
+              <a:rPr sz="1200" b="1" i="0">
+                <a:solidFill>
+                  <a:srgbClr val="FFFFFF"/>
+                </a:solidFill>
+                <a:latin typeface="Alegreya Sans"/>
+              </a:rPr>
+              <a:t>Due diligences pour des fonds de Private Equity</a:t>
+            </a:r>
+            <a:r>
+              <a:rPr sz="1200" b="0" i="0">
+                <a:solidFill>
+                  <a:srgbClr val="FFFFFF"/>
+                </a:solidFill>
+                <a:latin typeface="Alegreya Sans"/>
+              </a:rPr>
+              <a:t> — L.E.K. puis missions indépendantes</a:t>
+            </a:r>
+            <a:r>
+              <a:rPr sz="1200" b="0" i="1">
+                <a:solidFill>
+                  <a:srgbClr val="3AEDE5"/>
+                </a:solidFill>
+                <a:latin typeface="Alegreya Sans"/>
+              </a:rPr>
+              <a:t>  (2016 — 2018 et depuis 2022)</a:t>
+            </a:r>
+          </a:p>
+          <a:p>
+            <a:pPr algn="l" lvl="1">
+              <a:spcAft>
+                <a:spcPts val="100"/>
+              </a:spcAft>
+            </a:pPr>
+            <a:r>
+              <a:rPr sz="1200" b="1" i="0">
+                <a:solidFill>
+                  <a:srgbClr val="3AEDE5"/>
+                </a:solidFill>
+                <a:latin typeface="Alegreya Sans"/>
+              </a:rPr>
+              <a:t>•  </a:t>
+            </a:r>
+            <a:r>
+              <a:rPr sz="1200" b="0" i="0">
+                <a:solidFill>
+                  <a:srgbClr val="FFFFFF"/>
+                </a:solidFill>
+                <a:latin typeface="Alegreya Sans"/>
+              </a:rPr>
+              <a:t>Santé : évaluation de l'attractivité de Lagarrigue (appareillage orthopédique) et de Fasonut (nutrition artificielle) — entretiens experts fabricants, orthopédistes, Big Pharmas, hôpitaux.</a:t>
+            </a:r>
+          </a:p>
+          <a:p>
+            <a:pPr algn="l" lvl="1">
+              <a:spcAft>
+                <a:spcPts val="100"/>
+              </a:spcAft>
+            </a:pPr>
+            <a:r>
+              <a:rPr sz="1200" b="1" i="0">
+                <a:solidFill>
+                  <a:srgbClr val="3AEDE5"/>
+                </a:solidFill>
+                <a:latin typeface="Alegreya Sans"/>
+              </a:rPr>
+              <a:t>•  </a:t>
+            </a:r>
+            <a:r>
+              <a:rPr sz="1200" b="0" i="0">
+                <a:solidFill>
+                  <a:srgbClr val="FFFFFF"/>
+                </a:solidFill>
+                <a:latin typeface="Alegreya Sans"/>
+              </a:rPr>
+              <a:t>Industrie &amp; BTP : Gerflor (modélisation de marché par verticale santé / éducation / logement social), Mecatherm (tendances boulangerie Europe et Amérique du Nord), Groupe CIR (dispositifs de défiscalisation, revue du business plan), Revima (aéronautique, maintenance).</a:t>
+            </a:r>
+          </a:p>
+          <a:p>
+            <a:pPr algn="l" lvl="1">
+              <a:spcAft>
+                <a:spcPts val="100"/>
+              </a:spcAft>
+            </a:pPr>
+            <a:r>
+              <a:rPr sz="1200" b="1" i="0">
+                <a:solidFill>
+                  <a:srgbClr val="3AEDE5"/>
+                </a:solidFill>
+                <a:latin typeface="Alegreya Sans"/>
+              </a:rPr>
+              <a:t>•  </a:t>
+            </a:r>
+            <a:r>
+              <a:rPr sz="1200" b="0" i="0">
+                <a:solidFill>
+                  <a:srgbClr val="FFFFFF"/>
+                </a:solidFill>
+                <a:latin typeface="Alegreya Sans"/>
+              </a:rPr>
+              <a:t>Retail, beauté &amp; télécom : ECF, Moustache (store-checks vélo, management d'une stagiaire), Liérac (marché cosmétique anti-âge, store-checks pharmacies), Evernex (modélisation du marché de la maintenance serveurs et data centers).</a:t>
+            </a:r>
+          </a:p>
+          <a:p>
+            <a:pPr algn="l" lvl="1">
+              <a:spcAft>
+                <a:spcPts val="100"/>
+              </a:spcAft>
+            </a:pPr>
+            <a:r>
+              <a:rPr sz="1200" b="1" i="0">
+                <a:solidFill>
+                  <a:srgbClr val="3AEDE5"/>
+                </a:solidFill>
+                <a:latin typeface="Alegreya Sans"/>
+              </a:rPr>
+              <a:t>•  </a:t>
+            </a:r>
+            <a:r>
+              <a:rPr sz="1200" b="0" i="0">
+                <a:solidFill>
+                  <a:srgbClr val="FFFFFF"/>
+                </a:solidFill>
+                <a:latin typeface="Alegreya Sans"/>
+              </a:rPr>
+              <a:t>Méthodologie transverse : entretiens experts, analyses quantitatives et qualitatives de marché, benchmark externe, mapping des processus d'achat clients.</a:t>
+            </a:r>
+          </a:p>
+        </p:txBody>
+      </p:sp>
+      <p:sp>
+        <p:nvSpPr>
+          <p:cNvPr id="9" name="Rectangle 8"/>
+          <p:cNvSpPr/>
+          <p:nvPr/>
+        </p:nvSpPr>
+        <p:spPr>
+          <a:xfrm>
+            <a:off x="0" y="6578000"/>
+            <a:ext cx="12192000" cy="280000"/>
+          </a:xfrm>
+          <a:prstGeom prst="rect">
+            <a:avLst/>
+          </a:prstGeom>
+          <a:solidFill>
+            <a:srgbClr val="061A5E"/>
+          </a:solidFill>
+          <a:ln>
+            <a:noFill/>
+          </a:ln>
+          <a:effectLst/>
+        </p:spPr>
+        <p:style>
+          <a:lnRef idx="1">
+            <a:schemeClr val="accent1"/>
+          </a:lnRef>
+          <a:fillRef idx="3">
+            <a:schemeClr val="accent1"/>
+          </a:fillRef>
+          <a:effectRef idx="2">
+            <a:schemeClr val="accent1"/>
+          </a:effectRef>
+          <a:fontRef idx="minor">
+            <a:schemeClr val="lt1"/>
+          </a:fontRef>
+        </p:style>
+        <p:txBody>
+          <a:bodyPr rtlCol="0" anchor="ctr"/>
+          <a:lstStyle/>
+          <a:p>
+            <a:pPr algn="ctr"/>
+          </a:p>
+        </p:txBody>
+      </p:sp>
+      <p:sp>
+        <p:nvSpPr>
+          <p:cNvPr id="10" name="TextBox 9"/>
+          <p:cNvSpPr txBox="1"/>
+          <p:nvPr/>
+        </p:nvSpPr>
+        <p:spPr>
+          <a:xfrm>
+            <a:off x="228600" y="6578000"/>
+            <a:ext cx="11734800" cy="280000"/>
+          </a:xfrm>
+          <a:prstGeom prst="rect">
+            <a:avLst/>
+          </a:prstGeom>
+          <a:noFill/>
+        </p:spPr>
+        <p:txBody>
+          <a:bodyPr wrap="square" lIns="0" rIns="0" tIns="0" bIns="0">
+            <a:spAutoFit/>
+          </a:bodyPr>
+          <a:lstStyle/>
+          <a:p>
+            <a:pPr algn="ctr"/>
+            <a:r>
+              <a:rPr sz="1000" b="0" i="1">
+                <a:solidFill>
+                  <a:srgbClr val="CCD6E8"/>
+                </a:solidFill>
+                <a:latin typeface="Alegreya Sans"/>
+              </a:rPr>
+              <a:t>Les informations de ce document sont strictement confidentielles — Ce document ne peut être partagé qu'avec l'accord de son propriétaire</a:t>
             </a:r>
           </a:p>
         </p:txBody>

--- a/outputs/L.B._strategie_innovation.pptx
+++ b/outputs/L.B._strategie_innovation.pptx
@@ -4421,6 +4421,194 @@
               <a:t>Marketing digital</a:t>
             </a:r>
           </a:p>
+          <a:p>
+            <a:pPr algn="l">
+              <a:spcBef>
+                <a:spcPts val="600"/>
+              </a:spcBef>
+              <a:spcAft>
+                <a:spcPts val="300"/>
+              </a:spcAft>
+            </a:pPr>
+            <a:r>
+              <a:rPr sz="1300" b="1" i="0">
+                <a:solidFill>
+                  <a:srgbClr val="3AEDE5"/>
+                </a:solidFill>
+                <a:latin typeface="Alegreya Sans"/>
+              </a:rPr>
+              <a:t>FORMATION &amp; CERTIFICATIONS</a:t>
+            </a:r>
+          </a:p>
+          <a:p>
+            <a:pPr algn="l">
+              <a:spcAft>
+                <a:spcPts val="100"/>
+              </a:spcAft>
+            </a:pPr>
+            <a:r>
+              <a:rPr sz="1200" b="1" i="0">
+                <a:solidFill>
+                  <a:srgbClr val="3AEDE5"/>
+                </a:solidFill>
+                <a:latin typeface="Alegreya Sans"/>
+              </a:rPr>
+              <a:t>2015  </a:t>
+            </a:r>
+            <a:r>
+              <a:rPr sz="1200" b="1" i="0">
+                <a:solidFill>
+                  <a:srgbClr val="FFFFFF"/>
+                </a:solidFill>
+                <a:latin typeface="Alegreya Sans"/>
+              </a:rPr>
+              <a:t>EMLYON Business School</a:t>
+            </a:r>
+          </a:p>
+          <a:p>
+            <a:pPr algn="l">
+              <a:spcAft>
+                <a:spcPts val="300"/>
+              </a:spcAft>
+            </a:pPr>
+            <a:r>
+              <a:rPr sz="1200" b="0" i="1">
+                <a:solidFill>
+                  <a:srgbClr val="CCD6E8"/>
+                </a:solidFill>
+                <a:latin typeface="Alegreya Sans"/>
+              </a:rPr>
+              <a:t>Programme Grande École</a:t>
+            </a:r>
+          </a:p>
+          <a:p>
+            <a:pPr algn="l">
+              <a:spcAft>
+                <a:spcPts val="100"/>
+              </a:spcAft>
+            </a:pPr>
+            <a:r>
+              <a:rPr sz="1200" b="1" i="0">
+                <a:solidFill>
+                  <a:srgbClr val="3AEDE5"/>
+                </a:solidFill>
+                <a:latin typeface="Alegreya Sans"/>
+              </a:rPr>
+              <a:t>2023  </a:t>
+            </a:r>
+            <a:r>
+              <a:rPr sz="1200" b="1" i="0">
+                <a:solidFill>
+                  <a:srgbClr val="FFFFFF"/>
+                </a:solidFill>
+                <a:latin typeface="Alegreya Sans"/>
+              </a:rPr>
+              <a:t>Coaching Ways</a:t>
+            </a:r>
+          </a:p>
+          <a:p>
+            <a:pPr algn="l">
+              <a:spcAft>
+                <a:spcPts val="300"/>
+              </a:spcAft>
+            </a:pPr>
+            <a:r>
+              <a:rPr sz="1200" b="0" i="1">
+                <a:solidFill>
+                  <a:srgbClr val="CCD6E8"/>
+                </a:solidFill>
+                <a:latin typeface="Alegreya Sans"/>
+              </a:rPr>
+              <a:t>Coach certifiée</a:t>
+            </a:r>
+          </a:p>
+          <a:p>
+            <a:pPr algn="l">
+              <a:spcBef>
+                <a:spcPts val="600"/>
+              </a:spcBef>
+              <a:spcAft>
+                <a:spcPts val="300"/>
+              </a:spcAft>
+            </a:pPr>
+            <a:r>
+              <a:rPr sz="1300" b="1" i="0">
+                <a:solidFill>
+                  <a:srgbClr val="3AEDE5"/>
+                </a:solidFill>
+                <a:latin typeface="Alegreya Sans"/>
+              </a:rPr>
+              <a:t>ENGAGEMENTS &amp; RÉALISATIONS</a:t>
+            </a:r>
+          </a:p>
+          <a:p>
+            <a:pPr algn="l">
+              <a:spcAft>
+                <a:spcPts val="200"/>
+              </a:spcAft>
+            </a:pPr>
+            <a:r>
+              <a:rPr sz="1200" b="1" i="0">
+                <a:solidFill>
+                  <a:srgbClr val="3AEDE5"/>
+                </a:solidFill>
+                <a:latin typeface="Alegreya Sans"/>
+              </a:rPr>
+              <a:t>• </a:t>
+            </a:r>
+            <a:r>
+              <a:rPr sz="1200" b="1" i="0">
+                <a:solidFill>
+                  <a:srgbClr val="FFFFFF"/>
+                </a:solidFill>
+                <a:latin typeface="Alegreya Sans"/>
+              </a:rPr>
+              <a:t>Autrice — « À la poursuite du Phaos »</a:t>
+            </a:r>
+            <a:r>
+              <a:rPr sz="1200" b="0" i="1">
+                <a:solidFill>
+                  <a:srgbClr val="CCD6E8"/>
+                </a:solidFill>
+                <a:latin typeface="Alegreya Sans"/>
+              </a:rPr>
+              <a:t> — Libérez le pouvoir créatif en entreprise (Amazon KDP)</a:t>
+            </a:r>
+          </a:p>
+          <a:p>
+            <a:pPr algn="l">
+              <a:spcAft>
+                <a:spcPts val="200"/>
+              </a:spcAft>
+            </a:pPr>
+            <a:r>
+              <a:rPr sz="1200" b="1" i="0">
+                <a:solidFill>
+                  <a:srgbClr val="3AEDE5"/>
+                </a:solidFill>
+                <a:latin typeface="Alegreya Sans"/>
+              </a:rPr>
+              <a:t>• </a:t>
+            </a:r>
+            <a:r>
+              <a:rPr sz="1200" b="1" i="0">
+                <a:solidFill>
+                  <a:srgbClr val="FFFFFF"/>
+                </a:solidFill>
+                <a:latin typeface="Alegreya Sans"/>
+              </a:rPr>
+              <a:t>Créatrice d'un talk show</a:t>
+            </a:r>
+            <a:r>
+              <a:rPr sz="1200" b="0" i="1">
+                <a:solidFill>
+                  <a:srgbClr val="CCD6E8"/>
+                </a:solidFill>
+                <a:latin typeface="Alegreya Sans"/>
+              </a:rPr>
+              <a:t> — Transformation des organisations, leadership et innovation — 23 talks tournés</a:t>
+            </a:r>
+          </a:p>
         </p:txBody>
       </p:sp>
       <p:sp>
@@ -4431,8 +4619,8 @@
         </p:nvSpPr>
         <p:spPr>
           <a:xfrm>
-            <a:off x="4528600" y="1180000"/>
-            <a:ext cx="7434800" cy="5318000"/>
+            <a:off x="4528600" y="1649900"/>
+            <a:ext cx="7434800" cy="4848100"/>
           </a:xfrm>
           <a:prstGeom prst="rect">
             <a:avLst/>
@@ -5288,6 +5476,194 @@
               <a:t>Marketing digital</a:t>
             </a:r>
           </a:p>
+          <a:p>
+            <a:pPr algn="l">
+              <a:spcBef>
+                <a:spcPts val="600"/>
+              </a:spcBef>
+              <a:spcAft>
+                <a:spcPts val="300"/>
+              </a:spcAft>
+            </a:pPr>
+            <a:r>
+              <a:rPr sz="1300" b="1" i="0">
+                <a:solidFill>
+                  <a:srgbClr val="3AEDE5"/>
+                </a:solidFill>
+                <a:latin typeface="Alegreya Sans"/>
+              </a:rPr>
+              <a:t>FORMATION &amp; CERTIFICATIONS</a:t>
+            </a:r>
+          </a:p>
+          <a:p>
+            <a:pPr algn="l">
+              <a:spcAft>
+                <a:spcPts val="100"/>
+              </a:spcAft>
+            </a:pPr>
+            <a:r>
+              <a:rPr sz="1200" b="1" i="0">
+                <a:solidFill>
+                  <a:srgbClr val="3AEDE5"/>
+                </a:solidFill>
+                <a:latin typeface="Alegreya Sans"/>
+              </a:rPr>
+              <a:t>2015  </a:t>
+            </a:r>
+            <a:r>
+              <a:rPr sz="1200" b="1" i="0">
+                <a:solidFill>
+                  <a:srgbClr val="FFFFFF"/>
+                </a:solidFill>
+                <a:latin typeface="Alegreya Sans"/>
+              </a:rPr>
+              <a:t>EMLYON Business School</a:t>
+            </a:r>
+          </a:p>
+          <a:p>
+            <a:pPr algn="l">
+              <a:spcAft>
+                <a:spcPts val="300"/>
+              </a:spcAft>
+            </a:pPr>
+            <a:r>
+              <a:rPr sz="1200" b="0" i="1">
+                <a:solidFill>
+                  <a:srgbClr val="CCD6E8"/>
+                </a:solidFill>
+                <a:latin typeface="Alegreya Sans"/>
+              </a:rPr>
+              <a:t>Programme Grande École</a:t>
+            </a:r>
+          </a:p>
+          <a:p>
+            <a:pPr algn="l">
+              <a:spcAft>
+                <a:spcPts val="100"/>
+              </a:spcAft>
+            </a:pPr>
+            <a:r>
+              <a:rPr sz="1200" b="1" i="0">
+                <a:solidFill>
+                  <a:srgbClr val="3AEDE5"/>
+                </a:solidFill>
+                <a:latin typeface="Alegreya Sans"/>
+              </a:rPr>
+              <a:t>2023  </a:t>
+            </a:r>
+            <a:r>
+              <a:rPr sz="1200" b="1" i="0">
+                <a:solidFill>
+                  <a:srgbClr val="FFFFFF"/>
+                </a:solidFill>
+                <a:latin typeface="Alegreya Sans"/>
+              </a:rPr>
+              <a:t>Coaching Ways</a:t>
+            </a:r>
+          </a:p>
+          <a:p>
+            <a:pPr algn="l">
+              <a:spcAft>
+                <a:spcPts val="300"/>
+              </a:spcAft>
+            </a:pPr>
+            <a:r>
+              <a:rPr sz="1200" b="0" i="1">
+                <a:solidFill>
+                  <a:srgbClr val="CCD6E8"/>
+                </a:solidFill>
+                <a:latin typeface="Alegreya Sans"/>
+              </a:rPr>
+              <a:t>Coach certifiée</a:t>
+            </a:r>
+          </a:p>
+          <a:p>
+            <a:pPr algn="l">
+              <a:spcBef>
+                <a:spcPts val="600"/>
+              </a:spcBef>
+              <a:spcAft>
+                <a:spcPts val="300"/>
+              </a:spcAft>
+            </a:pPr>
+            <a:r>
+              <a:rPr sz="1300" b="1" i="0">
+                <a:solidFill>
+                  <a:srgbClr val="3AEDE5"/>
+                </a:solidFill>
+                <a:latin typeface="Alegreya Sans"/>
+              </a:rPr>
+              <a:t>ENGAGEMENTS &amp; RÉALISATIONS</a:t>
+            </a:r>
+          </a:p>
+          <a:p>
+            <a:pPr algn="l">
+              <a:spcAft>
+                <a:spcPts val="200"/>
+              </a:spcAft>
+            </a:pPr>
+            <a:r>
+              <a:rPr sz="1200" b="1" i="0">
+                <a:solidFill>
+                  <a:srgbClr val="3AEDE5"/>
+                </a:solidFill>
+                <a:latin typeface="Alegreya Sans"/>
+              </a:rPr>
+              <a:t>• </a:t>
+            </a:r>
+            <a:r>
+              <a:rPr sz="1200" b="1" i="0">
+                <a:solidFill>
+                  <a:srgbClr val="FFFFFF"/>
+                </a:solidFill>
+                <a:latin typeface="Alegreya Sans"/>
+              </a:rPr>
+              <a:t>Autrice — « À la poursuite du Phaos »</a:t>
+            </a:r>
+            <a:r>
+              <a:rPr sz="1200" b="0" i="1">
+                <a:solidFill>
+                  <a:srgbClr val="CCD6E8"/>
+                </a:solidFill>
+                <a:latin typeface="Alegreya Sans"/>
+              </a:rPr>
+              <a:t> — Libérez le pouvoir créatif en entreprise (Amazon KDP)</a:t>
+            </a:r>
+          </a:p>
+          <a:p>
+            <a:pPr algn="l">
+              <a:spcAft>
+                <a:spcPts val="200"/>
+              </a:spcAft>
+            </a:pPr>
+            <a:r>
+              <a:rPr sz="1200" b="1" i="0">
+                <a:solidFill>
+                  <a:srgbClr val="3AEDE5"/>
+                </a:solidFill>
+                <a:latin typeface="Alegreya Sans"/>
+              </a:rPr>
+              <a:t>• </a:t>
+            </a:r>
+            <a:r>
+              <a:rPr sz="1200" b="1" i="0">
+                <a:solidFill>
+                  <a:srgbClr val="FFFFFF"/>
+                </a:solidFill>
+                <a:latin typeface="Alegreya Sans"/>
+              </a:rPr>
+              <a:t>Créatrice d'un talk show</a:t>
+            </a:r>
+            <a:r>
+              <a:rPr sz="1200" b="0" i="1">
+                <a:solidFill>
+                  <a:srgbClr val="CCD6E8"/>
+                </a:solidFill>
+                <a:latin typeface="Alegreya Sans"/>
+              </a:rPr>
+              <a:t> — Transformation des organisations, leadership et innovation — 23 talks tournés</a:t>
+            </a:r>
+          </a:p>
         </p:txBody>
       </p:sp>
       <p:sp>
@@ -5298,8 +5674,8 @@
         </p:nvSpPr>
         <p:spPr>
           <a:xfrm>
-            <a:off x="4528600" y="1180000"/>
-            <a:ext cx="7434800" cy="5318000"/>
+            <a:off x="4528600" y="1649900"/>
+            <a:ext cx="7434800" cy="4848100"/>
           </a:xfrm>
           <a:prstGeom prst="rect">
             <a:avLst/>
@@ -6223,6 +6599,194 @@
               <a:t>Marketing digital</a:t>
             </a:r>
           </a:p>
+          <a:p>
+            <a:pPr algn="l">
+              <a:spcBef>
+                <a:spcPts val="600"/>
+              </a:spcBef>
+              <a:spcAft>
+                <a:spcPts val="300"/>
+              </a:spcAft>
+            </a:pPr>
+            <a:r>
+              <a:rPr sz="1300" b="1" i="0">
+                <a:solidFill>
+                  <a:srgbClr val="3AEDE5"/>
+                </a:solidFill>
+                <a:latin typeface="Alegreya Sans"/>
+              </a:rPr>
+              <a:t>FORMATION &amp; CERTIFICATIONS</a:t>
+            </a:r>
+          </a:p>
+          <a:p>
+            <a:pPr algn="l">
+              <a:spcAft>
+                <a:spcPts val="100"/>
+              </a:spcAft>
+            </a:pPr>
+            <a:r>
+              <a:rPr sz="1200" b="1" i="0">
+                <a:solidFill>
+                  <a:srgbClr val="3AEDE5"/>
+                </a:solidFill>
+                <a:latin typeface="Alegreya Sans"/>
+              </a:rPr>
+              <a:t>2015  </a:t>
+            </a:r>
+            <a:r>
+              <a:rPr sz="1200" b="1" i="0">
+                <a:solidFill>
+                  <a:srgbClr val="FFFFFF"/>
+                </a:solidFill>
+                <a:latin typeface="Alegreya Sans"/>
+              </a:rPr>
+              <a:t>EMLYON Business School</a:t>
+            </a:r>
+          </a:p>
+          <a:p>
+            <a:pPr algn="l">
+              <a:spcAft>
+                <a:spcPts val="300"/>
+              </a:spcAft>
+            </a:pPr>
+            <a:r>
+              <a:rPr sz="1200" b="0" i="1">
+                <a:solidFill>
+                  <a:srgbClr val="CCD6E8"/>
+                </a:solidFill>
+                <a:latin typeface="Alegreya Sans"/>
+              </a:rPr>
+              <a:t>Programme Grande École</a:t>
+            </a:r>
+          </a:p>
+          <a:p>
+            <a:pPr algn="l">
+              <a:spcAft>
+                <a:spcPts val="100"/>
+              </a:spcAft>
+            </a:pPr>
+            <a:r>
+              <a:rPr sz="1200" b="1" i="0">
+                <a:solidFill>
+                  <a:srgbClr val="3AEDE5"/>
+                </a:solidFill>
+                <a:latin typeface="Alegreya Sans"/>
+              </a:rPr>
+              <a:t>2023  </a:t>
+            </a:r>
+            <a:r>
+              <a:rPr sz="1200" b="1" i="0">
+                <a:solidFill>
+                  <a:srgbClr val="FFFFFF"/>
+                </a:solidFill>
+                <a:latin typeface="Alegreya Sans"/>
+              </a:rPr>
+              <a:t>Coaching Ways</a:t>
+            </a:r>
+          </a:p>
+          <a:p>
+            <a:pPr algn="l">
+              <a:spcAft>
+                <a:spcPts val="300"/>
+              </a:spcAft>
+            </a:pPr>
+            <a:r>
+              <a:rPr sz="1200" b="0" i="1">
+                <a:solidFill>
+                  <a:srgbClr val="CCD6E8"/>
+                </a:solidFill>
+                <a:latin typeface="Alegreya Sans"/>
+              </a:rPr>
+              <a:t>Coach certifiée</a:t>
+            </a:r>
+          </a:p>
+          <a:p>
+            <a:pPr algn="l">
+              <a:spcBef>
+                <a:spcPts val="600"/>
+              </a:spcBef>
+              <a:spcAft>
+                <a:spcPts val="300"/>
+              </a:spcAft>
+            </a:pPr>
+            <a:r>
+              <a:rPr sz="1300" b="1" i="0">
+                <a:solidFill>
+                  <a:srgbClr val="3AEDE5"/>
+                </a:solidFill>
+                <a:latin typeface="Alegreya Sans"/>
+              </a:rPr>
+              <a:t>ENGAGEMENTS &amp; RÉALISATIONS</a:t>
+            </a:r>
+          </a:p>
+          <a:p>
+            <a:pPr algn="l">
+              <a:spcAft>
+                <a:spcPts val="200"/>
+              </a:spcAft>
+            </a:pPr>
+            <a:r>
+              <a:rPr sz="1200" b="1" i="0">
+                <a:solidFill>
+                  <a:srgbClr val="3AEDE5"/>
+                </a:solidFill>
+                <a:latin typeface="Alegreya Sans"/>
+              </a:rPr>
+              <a:t>• </a:t>
+            </a:r>
+            <a:r>
+              <a:rPr sz="1200" b="1" i="0">
+                <a:solidFill>
+                  <a:srgbClr val="FFFFFF"/>
+                </a:solidFill>
+                <a:latin typeface="Alegreya Sans"/>
+              </a:rPr>
+              <a:t>Autrice — « À la poursuite du Phaos »</a:t>
+            </a:r>
+            <a:r>
+              <a:rPr sz="1200" b="0" i="1">
+                <a:solidFill>
+                  <a:srgbClr val="CCD6E8"/>
+                </a:solidFill>
+                <a:latin typeface="Alegreya Sans"/>
+              </a:rPr>
+              <a:t> — Libérez le pouvoir créatif en entreprise (Amazon KDP)</a:t>
+            </a:r>
+          </a:p>
+          <a:p>
+            <a:pPr algn="l">
+              <a:spcAft>
+                <a:spcPts val="200"/>
+              </a:spcAft>
+            </a:pPr>
+            <a:r>
+              <a:rPr sz="1200" b="1" i="0">
+                <a:solidFill>
+                  <a:srgbClr val="3AEDE5"/>
+                </a:solidFill>
+                <a:latin typeface="Alegreya Sans"/>
+              </a:rPr>
+              <a:t>• </a:t>
+            </a:r>
+            <a:r>
+              <a:rPr sz="1200" b="1" i="0">
+                <a:solidFill>
+                  <a:srgbClr val="FFFFFF"/>
+                </a:solidFill>
+                <a:latin typeface="Alegreya Sans"/>
+              </a:rPr>
+              <a:t>Créatrice d'un talk show</a:t>
+            </a:r>
+            <a:r>
+              <a:rPr sz="1200" b="0" i="1">
+                <a:solidFill>
+                  <a:srgbClr val="CCD6E8"/>
+                </a:solidFill>
+                <a:latin typeface="Alegreya Sans"/>
+              </a:rPr>
+              <a:t> — Transformation des organisations, leadership et innovation — 23 talks tournés</a:t>
+            </a:r>
+          </a:p>
         </p:txBody>
       </p:sp>
       <p:sp>
@@ -6233,8 +6797,8 @@
         </p:nvSpPr>
         <p:spPr>
           <a:xfrm>
-            <a:off x="4528600" y="1180000"/>
-            <a:ext cx="7434800" cy="5318000"/>
+            <a:off x="4528600" y="1649900"/>
+            <a:ext cx="7434800" cy="4848100"/>
           </a:xfrm>
           <a:prstGeom prst="rect">
             <a:avLst/>
@@ -7115,6 +7679,194 @@
               <a:t>Marketing digital</a:t>
             </a:r>
           </a:p>
+          <a:p>
+            <a:pPr algn="l">
+              <a:spcBef>
+                <a:spcPts val="600"/>
+              </a:spcBef>
+              <a:spcAft>
+                <a:spcPts val="300"/>
+              </a:spcAft>
+            </a:pPr>
+            <a:r>
+              <a:rPr sz="1300" b="1" i="0">
+                <a:solidFill>
+                  <a:srgbClr val="3AEDE5"/>
+                </a:solidFill>
+                <a:latin typeface="Alegreya Sans"/>
+              </a:rPr>
+              <a:t>FORMATION &amp; CERTIFICATIONS</a:t>
+            </a:r>
+          </a:p>
+          <a:p>
+            <a:pPr algn="l">
+              <a:spcAft>
+                <a:spcPts val="100"/>
+              </a:spcAft>
+            </a:pPr>
+            <a:r>
+              <a:rPr sz="1200" b="1" i="0">
+                <a:solidFill>
+                  <a:srgbClr val="3AEDE5"/>
+                </a:solidFill>
+                <a:latin typeface="Alegreya Sans"/>
+              </a:rPr>
+              <a:t>2015  </a:t>
+            </a:r>
+            <a:r>
+              <a:rPr sz="1200" b="1" i="0">
+                <a:solidFill>
+                  <a:srgbClr val="FFFFFF"/>
+                </a:solidFill>
+                <a:latin typeface="Alegreya Sans"/>
+              </a:rPr>
+              <a:t>EMLYON Business School</a:t>
+            </a:r>
+          </a:p>
+          <a:p>
+            <a:pPr algn="l">
+              <a:spcAft>
+                <a:spcPts val="300"/>
+              </a:spcAft>
+            </a:pPr>
+            <a:r>
+              <a:rPr sz="1200" b="0" i="1">
+                <a:solidFill>
+                  <a:srgbClr val="CCD6E8"/>
+                </a:solidFill>
+                <a:latin typeface="Alegreya Sans"/>
+              </a:rPr>
+              <a:t>Programme Grande École</a:t>
+            </a:r>
+          </a:p>
+          <a:p>
+            <a:pPr algn="l">
+              <a:spcAft>
+                <a:spcPts val="100"/>
+              </a:spcAft>
+            </a:pPr>
+            <a:r>
+              <a:rPr sz="1200" b="1" i="0">
+                <a:solidFill>
+                  <a:srgbClr val="3AEDE5"/>
+                </a:solidFill>
+                <a:latin typeface="Alegreya Sans"/>
+              </a:rPr>
+              <a:t>2023  </a:t>
+            </a:r>
+            <a:r>
+              <a:rPr sz="1200" b="1" i="0">
+                <a:solidFill>
+                  <a:srgbClr val="FFFFFF"/>
+                </a:solidFill>
+                <a:latin typeface="Alegreya Sans"/>
+              </a:rPr>
+              <a:t>Coaching Ways</a:t>
+            </a:r>
+          </a:p>
+          <a:p>
+            <a:pPr algn="l">
+              <a:spcAft>
+                <a:spcPts val="300"/>
+              </a:spcAft>
+            </a:pPr>
+            <a:r>
+              <a:rPr sz="1200" b="0" i="1">
+                <a:solidFill>
+                  <a:srgbClr val="CCD6E8"/>
+                </a:solidFill>
+                <a:latin typeface="Alegreya Sans"/>
+              </a:rPr>
+              <a:t>Coach certifiée</a:t>
+            </a:r>
+          </a:p>
+          <a:p>
+            <a:pPr algn="l">
+              <a:spcBef>
+                <a:spcPts val="600"/>
+              </a:spcBef>
+              <a:spcAft>
+                <a:spcPts val="300"/>
+              </a:spcAft>
+            </a:pPr>
+            <a:r>
+              <a:rPr sz="1300" b="1" i="0">
+                <a:solidFill>
+                  <a:srgbClr val="3AEDE5"/>
+                </a:solidFill>
+                <a:latin typeface="Alegreya Sans"/>
+              </a:rPr>
+              <a:t>ENGAGEMENTS &amp; RÉALISATIONS</a:t>
+            </a:r>
+          </a:p>
+          <a:p>
+            <a:pPr algn="l">
+              <a:spcAft>
+                <a:spcPts val="200"/>
+              </a:spcAft>
+            </a:pPr>
+            <a:r>
+              <a:rPr sz="1200" b="1" i="0">
+                <a:solidFill>
+                  <a:srgbClr val="3AEDE5"/>
+                </a:solidFill>
+                <a:latin typeface="Alegreya Sans"/>
+              </a:rPr>
+              <a:t>• </a:t>
+            </a:r>
+            <a:r>
+              <a:rPr sz="1200" b="1" i="0">
+                <a:solidFill>
+                  <a:srgbClr val="FFFFFF"/>
+                </a:solidFill>
+                <a:latin typeface="Alegreya Sans"/>
+              </a:rPr>
+              <a:t>Autrice — « À la poursuite du Phaos »</a:t>
+            </a:r>
+            <a:r>
+              <a:rPr sz="1200" b="0" i="1">
+                <a:solidFill>
+                  <a:srgbClr val="CCD6E8"/>
+                </a:solidFill>
+                <a:latin typeface="Alegreya Sans"/>
+              </a:rPr>
+              <a:t> — Libérez le pouvoir créatif en entreprise (Amazon KDP)</a:t>
+            </a:r>
+          </a:p>
+          <a:p>
+            <a:pPr algn="l">
+              <a:spcAft>
+                <a:spcPts val="200"/>
+              </a:spcAft>
+            </a:pPr>
+            <a:r>
+              <a:rPr sz="1200" b="1" i="0">
+                <a:solidFill>
+                  <a:srgbClr val="3AEDE5"/>
+                </a:solidFill>
+                <a:latin typeface="Alegreya Sans"/>
+              </a:rPr>
+              <a:t>• </a:t>
+            </a:r>
+            <a:r>
+              <a:rPr sz="1200" b="1" i="0">
+                <a:solidFill>
+                  <a:srgbClr val="FFFFFF"/>
+                </a:solidFill>
+                <a:latin typeface="Alegreya Sans"/>
+              </a:rPr>
+              <a:t>Créatrice d'un talk show</a:t>
+            </a:r>
+            <a:r>
+              <a:rPr sz="1200" b="0" i="1">
+                <a:solidFill>
+                  <a:srgbClr val="CCD6E8"/>
+                </a:solidFill>
+                <a:latin typeface="Alegreya Sans"/>
+              </a:rPr>
+              <a:t> — Transformation des organisations, leadership et innovation — 23 talks tournés</a:t>
+            </a:r>
+          </a:p>
         </p:txBody>
       </p:sp>
       <p:sp>
@@ -7125,8 +7877,8 @@
         </p:nvSpPr>
         <p:spPr>
           <a:xfrm>
-            <a:off x="4528600" y="1180000"/>
-            <a:ext cx="7434800" cy="5318000"/>
+            <a:off x="4528600" y="1649900"/>
+            <a:ext cx="7434800" cy="4848100"/>
           </a:xfrm>
           <a:prstGeom prst="rect">
             <a:avLst/>
